--- a/slides/common/dev_env.pptx
+++ b/slides/common/dev_env.pptx
@@ -34,6 +34,12 @@
     <p:sldId id="282" r:id="rId33"/>
     <p:sldId id="283" r:id="rId34"/>
     <p:sldId id="284" r:id="rId35"/>
+    <p:sldId id="285" r:id="rId36"/>
+    <p:sldId id="286" r:id="rId37"/>
+    <p:sldId id="287" r:id="rId38"/>
+    <p:sldId id="288" r:id="rId39"/>
+    <p:sldId id="289" r:id="rId40"/>
+    <p:sldId id="290" r:id="rId41"/>
   </p:sldIdLst>
   <p:notesMasterIdLst>
     <p:notesMasterId r:id="rId15"/>
@@ -879,7 +885,7 @@
           <a:lstStyle/>
           <a:p>
             <a:r>
-              <a:t>여기서 각자 한 번 시켜 본다. 설치가 이미 끝난 사람은 파이썬 버전과 설치된 패키지를 정리해 달라고 시킨다. 지시가 길 필요는 없고, 목적과 실패 시 행동을 적는 것으로 충분하다.</a:t>
+              <a:t>Shift+Tab을 누르면 기본, acceptEdits, plan, bypassPermissions 순으로 돈다. 화면 아래 표시로 지금 어느 모드인지 항상 보인다. 수업에서는 plan 모드로 계획을 먼저 받고 실행으로 넘어가는 순서를 권한다.</a:t>
             </a:r>
           </a:p>
         </p:txBody>
@@ -949,7 +955,7 @@
           <a:lstStyle/>
           <a:p>
             <a:r>
-              <a:t>도구 사용 여부는 묻지 않는다. 설명할 수 있는지만 확인한다. 설명하지 못하는 제출물은 점수가 없다는 규칙을 여기서 한 번 말한다.</a:t>
+              <a:t>전면 자동은 확인을 없애는 기능이 아니라 확인 시점을 뒤로 미루는 기능이다. 되돌릴 수 없는 상태에서 열면 사고가 난다. 커밋하고 열고, 끝나면 git diff로 본다.</a:t>
             </a:r>
           </a:p>
         </p:txBody>
@@ -1019,7 +1025,7 @@
           <a:lstStyle/>
           <a:p>
             <a:r>
-              <a:t>코드를 쓰는 시간보다 확인하는 시간이 길어지는 것이 정상이다. 두 과목 과제 채점이 전부 이 항목을 본다.</a:t>
+              <a:t>여기서 각자 한 번 시켜 본다. 설치가 이미 끝난 사람은 파이썬 버전과 설치된 패키지를 정리해 달라고 시킨다. 지시가 길 필요는 없고, 목적과 실패 시 행동을 적는 것으로 충분하다.</a:t>
             </a:r>
           </a:p>
         </p:txBody>
@@ -1089,7 +1095,7 @@
           <a:lstStyle/>
           <a:p>
             <a:r>
-              <a:t>브랜치를 폴더로 펼쳐 놓은 것이 worktree다. 에이전트마다 폴더가 다르니 같은 파일을 동시에 고쳐도 충돌하지 않는다. 관심 있는 사람은 깃허브 stablyai/orca에서 내려받는다.</a:t>
+              <a:t>도구 사용 여부는 묻지 않는다. 설명할 수 있는지만 확인한다. 확인 없이 넘어간 코드가 오차의 출처다.</a:t>
             </a:r>
           </a:p>
         </p:txBody>
@@ -1159,7 +1165,7 @@
           <a:lstStyle/>
           <a:p>
             <a:r>
-              <a:t>도구를 늘리는 것이 진도를 늘리지 않는다. 확인이 병목이면 병렬 실행은 대기 화면만 늘린다.</a:t>
+              <a:t>명령 목록은 /help로 언제든 볼 수 있다. 오늘은 네 개만 외우게 한다. 모델 변경, 비우기, 압축, 규칙 파일이다.</a:t>
             </a:r>
           </a:p>
         </p:txBody>
@@ -1229,7 +1235,7 @@
           <a:lstStyle/>
           <a:p>
             <a:r>
-              <a:t>여기서 손을 들게 해 확인한다. 통과하지 못한 사람의 오류 메시지를 모아 오피스 아워에 처리한다.</a:t>
+              <a:t>한 세션에서 세 시간 붙잡고 있으면 앞부분 대화가 계속 따라다닌다. 학생들이 한도를 가장 빨리 소진하는 경로가 이것이다.</a:t>
             </a:r>
           </a:p>
         </p:txBody>
@@ -1369,7 +1375,7 @@
           <a:lstStyle/>
           <a:p>
             <a:r>
-              <a:t>학습 목표 네 가지를 다시 확인하고 마친다.</a:t>
+              <a:t>항상 가장 큰 모델을 쓰는 것은 한도를 빨리 쓰는 방법일 뿐이다. 반대로 검증하기 어려운 작업에 작은 모델을 쓰면 확인 비용이 더 든다.</a:t>
             </a:r>
           </a:p>
         </p:txBody>
@@ -1439,6 +1445,426 @@
           <a:lstStyle/>
           <a:p>
             <a:r>
+              <a:t>팀 프로젝트에서 특히 크다. 데이터 정의와 결정 근거를 md에 적어 두면 팀원과 에이전트가 같은 문서를 본다. 저장소 안에 있으니 깃 이력으로 언제 무엇이 바뀌었는지도 남는다.</a:t>
+            </a:r>
+          </a:p>
+        </p:txBody>
+      </p:sp>
+      <p:sp>
+        <p:nvSpPr>
+          <p:cNvPr id="4" name="Slide Number Placeholder 3"/>
+          <p:cNvSpPr>
+            <a:spLocks noGrp="1"/>
+          </p:cNvSpPr>
+          <p:nvPr>
+            <p:ph type="sldNum" idx="5" sz="quarter"/>
+          </p:nvPr>
+        </p:nvSpPr>
+        <p:spPr/>
+      </p:sp>
+    </p:spTree>
+  </p:cSld>
+  <p:clrMapOvr>
+    <a:masterClrMapping/>
+  </p:clrMapOvr>
+</p:notes>
+</file>
+
+<file path=ppt/notesSlides/notesSlide22.xml><?xml version="1.0" encoding="utf-8"?>
+<p:notes xmlns:a="http://schemas.openxmlformats.org/drawingml/2006/main" xmlns:p="http://schemas.openxmlformats.org/presentationml/2006/main" xmlns:r="http://schemas.openxmlformats.org/officeDocument/2006/relationships">
+  <p:cSld>
+    <p:spTree>
+      <p:nvGrpSpPr>
+        <p:cNvPr id="1" name=""/>
+        <p:cNvGrpSpPr/>
+        <p:nvPr/>
+      </p:nvGrpSpPr>
+      <p:grpSpPr>
+        <a:xfrm>
+          <a:off x="0" y="0"/>
+          <a:ext cx="0" cy="0"/>
+          <a:chOff x="0" y="0"/>
+          <a:chExt cx="0" cy="0"/>
+        </a:xfrm>
+      </p:grpSpPr>
+      <p:sp>
+        <p:nvSpPr>
+          <p:cNvPr id="2" name="Slide Image Placeholder 1"/>
+          <p:cNvSpPr>
+            <a:spLocks noGrp="1"/>
+          </p:cNvSpPr>
+          <p:nvPr>
+            <p:ph type="sldImg" idx="2"/>
+          </p:nvPr>
+        </p:nvSpPr>
+        <p:spPr/>
+      </p:sp>
+      <p:sp>
+        <p:nvSpPr>
+          <p:cNvPr id="3" name="Notes Placeholder 2"/>
+          <p:cNvSpPr>
+            <a:spLocks noGrp="1"/>
+          </p:cNvSpPr>
+          <p:nvPr>
+            <p:ph type="body" idx="3" sz="quarter"/>
+          </p:nvPr>
+        </p:nvSpPr>
+        <p:spPr/>
+        <p:txBody>
+          <a:bodyPr/>
+          <a:lstStyle/>
+          <a:p>
+            <a:r>
+              <a:t>네 가지를 지키면 같은 한도로 몇 배를 쓴다. 절약 자체가 목적이 아니라, 한 세션이 짧고 목적이 분명할수록 결과가 정확해진다.</a:t>
+            </a:r>
+          </a:p>
+        </p:txBody>
+      </p:sp>
+      <p:sp>
+        <p:nvSpPr>
+          <p:cNvPr id="4" name="Slide Number Placeholder 3"/>
+          <p:cNvSpPr>
+            <a:spLocks noGrp="1"/>
+          </p:cNvSpPr>
+          <p:nvPr>
+            <p:ph type="sldNum" idx="5" sz="quarter"/>
+          </p:nvPr>
+        </p:nvSpPr>
+        <p:spPr/>
+      </p:sp>
+    </p:spTree>
+  </p:cSld>
+  <p:clrMapOvr>
+    <a:masterClrMapping/>
+  </p:clrMapOvr>
+</p:notes>
+</file>
+
+<file path=ppt/notesSlides/notesSlide23.xml><?xml version="1.0" encoding="utf-8"?>
+<p:notes xmlns:a="http://schemas.openxmlformats.org/drawingml/2006/main" xmlns:p="http://schemas.openxmlformats.org/presentationml/2006/main" xmlns:r="http://schemas.openxmlformats.org/officeDocument/2006/relationships">
+  <p:cSld>
+    <p:spTree>
+      <p:nvGrpSpPr>
+        <p:cNvPr id="1" name=""/>
+        <p:cNvGrpSpPr/>
+        <p:nvPr/>
+      </p:nvGrpSpPr>
+      <p:grpSpPr>
+        <a:xfrm>
+          <a:off x="0" y="0"/>
+          <a:ext cx="0" cy="0"/>
+          <a:chOff x="0" y="0"/>
+          <a:chExt cx="0" cy="0"/>
+        </a:xfrm>
+      </p:grpSpPr>
+      <p:sp>
+        <p:nvSpPr>
+          <p:cNvPr id="2" name="Slide Image Placeholder 1"/>
+          <p:cNvSpPr>
+            <a:spLocks noGrp="1"/>
+          </p:cNvSpPr>
+          <p:nvPr>
+            <p:ph type="sldImg" idx="2"/>
+          </p:nvPr>
+        </p:nvSpPr>
+        <p:spPr/>
+      </p:sp>
+      <p:sp>
+        <p:nvSpPr>
+          <p:cNvPr id="3" name="Notes Placeholder 2"/>
+          <p:cNvSpPr>
+            <a:spLocks noGrp="1"/>
+          </p:cNvSpPr>
+          <p:nvPr>
+            <p:ph type="body" idx="3" sz="quarter"/>
+          </p:nvPr>
+        </p:nvSpPr>
+        <p:spPr/>
+        <p:txBody>
+          <a:bodyPr/>
+          <a:lstStyle/>
+          <a:p>
+            <a:r>
+              <a:t>브랜치마다 작업 폴더를 따로 두는 것이 worktree다. 에이전트마다 폴더가 다르니 같은 파일을 동시에 고쳐도 충돌하지 않는다. 관심 있는 사람은 깃허브 stablyai/orca에서 내려받는다.</a:t>
+            </a:r>
+          </a:p>
+        </p:txBody>
+      </p:sp>
+      <p:sp>
+        <p:nvSpPr>
+          <p:cNvPr id="4" name="Slide Number Placeholder 3"/>
+          <p:cNvSpPr>
+            <a:spLocks noGrp="1"/>
+          </p:cNvSpPr>
+          <p:nvPr>
+            <p:ph type="sldNum" idx="5" sz="quarter"/>
+          </p:nvPr>
+        </p:nvSpPr>
+        <p:spPr/>
+      </p:sp>
+    </p:spTree>
+  </p:cSld>
+  <p:clrMapOvr>
+    <a:masterClrMapping/>
+  </p:clrMapOvr>
+</p:notes>
+</file>
+
+<file path=ppt/notesSlides/notesSlide24.xml><?xml version="1.0" encoding="utf-8"?>
+<p:notes xmlns:a="http://schemas.openxmlformats.org/drawingml/2006/main" xmlns:p="http://schemas.openxmlformats.org/presentationml/2006/main" xmlns:r="http://schemas.openxmlformats.org/officeDocument/2006/relationships">
+  <p:cSld>
+    <p:spTree>
+      <p:nvGrpSpPr>
+        <p:cNvPr id="1" name=""/>
+        <p:cNvGrpSpPr/>
+        <p:nvPr/>
+      </p:nvGrpSpPr>
+      <p:grpSpPr>
+        <a:xfrm>
+          <a:off x="0" y="0"/>
+          <a:ext cx="0" cy="0"/>
+          <a:chOff x="0" y="0"/>
+          <a:chExt cx="0" cy="0"/>
+        </a:xfrm>
+      </p:grpSpPr>
+      <p:sp>
+        <p:nvSpPr>
+          <p:cNvPr id="2" name="Slide Image Placeholder 1"/>
+          <p:cNvSpPr>
+            <a:spLocks noGrp="1"/>
+          </p:cNvSpPr>
+          <p:nvPr>
+            <p:ph type="sldImg" idx="2"/>
+          </p:nvPr>
+        </p:nvSpPr>
+        <p:spPr/>
+      </p:sp>
+      <p:sp>
+        <p:nvSpPr>
+          <p:cNvPr id="3" name="Notes Placeholder 2"/>
+          <p:cNvSpPr>
+            <a:spLocks noGrp="1"/>
+          </p:cNvSpPr>
+          <p:nvPr>
+            <p:ph type="body" idx="3" sz="quarter"/>
+          </p:nvPr>
+        </p:nvSpPr>
+        <p:spPr/>
+        <p:txBody>
+          <a:bodyPr/>
+          <a:lstStyle/>
+          <a:p>
+            <a:r>
+              <a:t>도구를 늘리는 것이 진도를 늘리지 않는다. 확인이 병목이면 병렬 실행은 대기 화면만 늘린다.</a:t>
+            </a:r>
+          </a:p>
+        </p:txBody>
+      </p:sp>
+      <p:sp>
+        <p:nvSpPr>
+          <p:cNvPr id="4" name="Slide Number Placeholder 3"/>
+          <p:cNvSpPr>
+            <a:spLocks noGrp="1"/>
+          </p:cNvSpPr>
+          <p:nvPr>
+            <p:ph type="sldNum" idx="5" sz="quarter"/>
+          </p:nvPr>
+        </p:nvSpPr>
+        <p:spPr/>
+      </p:sp>
+    </p:spTree>
+  </p:cSld>
+  <p:clrMapOvr>
+    <a:masterClrMapping/>
+  </p:clrMapOvr>
+</p:notes>
+</file>
+
+<file path=ppt/notesSlides/notesSlide25.xml><?xml version="1.0" encoding="utf-8"?>
+<p:notes xmlns:a="http://schemas.openxmlformats.org/drawingml/2006/main" xmlns:p="http://schemas.openxmlformats.org/presentationml/2006/main" xmlns:r="http://schemas.openxmlformats.org/officeDocument/2006/relationships">
+  <p:cSld>
+    <p:spTree>
+      <p:nvGrpSpPr>
+        <p:cNvPr id="1" name=""/>
+        <p:cNvGrpSpPr/>
+        <p:nvPr/>
+      </p:nvGrpSpPr>
+      <p:grpSpPr>
+        <a:xfrm>
+          <a:off x="0" y="0"/>
+          <a:ext cx="0" cy="0"/>
+          <a:chOff x="0" y="0"/>
+          <a:chExt cx="0" cy="0"/>
+        </a:xfrm>
+      </p:grpSpPr>
+      <p:sp>
+        <p:nvSpPr>
+          <p:cNvPr id="2" name="Slide Image Placeholder 1"/>
+          <p:cNvSpPr>
+            <a:spLocks noGrp="1"/>
+          </p:cNvSpPr>
+          <p:nvPr>
+            <p:ph type="sldImg" idx="2"/>
+          </p:nvPr>
+        </p:nvSpPr>
+        <p:spPr/>
+      </p:sp>
+      <p:sp>
+        <p:nvSpPr>
+          <p:cNvPr id="3" name="Notes Placeholder 2"/>
+          <p:cNvSpPr>
+            <a:spLocks noGrp="1"/>
+          </p:cNvSpPr>
+          <p:nvPr>
+            <p:ph type="body" idx="3" sz="quarter"/>
+          </p:nvPr>
+        </p:nvSpPr>
+        <p:spPr/>
+        <p:txBody>
+          <a:bodyPr/>
+          <a:lstStyle/>
+          <a:p>
+            <a:r>
+              <a:t>여기서 손을 들게 해 확인한다. 통과하지 못한 사람의 오류 메시지를 모아 오피스 아워에 처리한다.</a:t>
+            </a:r>
+          </a:p>
+        </p:txBody>
+      </p:sp>
+      <p:sp>
+        <p:nvSpPr>
+          <p:cNvPr id="4" name="Slide Number Placeholder 3"/>
+          <p:cNvSpPr>
+            <a:spLocks noGrp="1"/>
+          </p:cNvSpPr>
+          <p:nvPr>
+            <p:ph type="sldNum" idx="5" sz="quarter"/>
+          </p:nvPr>
+        </p:nvSpPr>
+        <p:spPr/>
+      </p:sp>
+    </p:spTree>
+  </p:cSld>
+  <p:clrMapOvr>
+    <a:masterClrMapping/>
+  </p:clrMapOvr>
+</p:notes>
+</file>
+
+<file path=ppt/notesSlides/notesSlide26.xml><?xml version="1.0" encoding="utf-8"?>
+<p:notes xmlns:a="http://schemas.openxmlformats.org/drawingml/2006/main" xmlns:p="http://schemas.openxmlformats.org/presentationml/2006/main" xmlns:r="http://schemas.openxmlformats.org/officeDocument/2006/relationships">
+  <p:cSld>
+    <p:spTree>
+      <p:nvGrpSpPr>
+        <p:cNvPr id="1" name=""/>
+        <p:cNvGrpSpPr/>
+        <p:nvPr/>
+      </p:nvGrpSpPr>
+      <p:grpSpPr>
+        <a:xfrm>
+          <a:off x="0" y="0"/>
+          <a:ext cx="0" cy="0"/>
+          <a:chOff x="0" y="0"/>
+          <a:chExt cx="0" cy="0"/>
+        </a:xfrm>
+      </p:grpSpPr>
+      <p:sp>
+        <p:nvSpPr>
+          <p:cNvPr id="2" name="Slide Image Placeholder 1"/>
+          <p:cNvSpPr>
+            <a:spLocks noGrp="1"/>
+          </p:cNvSpPr>
+          <p:nvPr>
+            <p:ph type="sldImg" idx="2"/>
+          </p:nvPr>
+        </p:nvSpPr>
+        <p:spPr/>
+      </p:sp>
+      <p:sp>
+        <p:nvSpPr>
+          <p:cNvPr id="3" name="Notes Placeholder 2"/>
+          <p:cNvSpPr>
+            <a:spLocks noGrp="1"/>
+          </p:cNvSpPr>
+          <p:nvPr>
+            <p:ph type="body" idx="3" sz="quarter"/>
+          </p:nvPr>
+        </p:nvSpPr>
+        <p:spPr/>
+        <p:txBody>
+          <a:bodyPr/>
+          <a:lstStyle/>
+          <a:p>
+            <a:r>
+              <a:t>학습 목표 네 가지를 다시 확인하고 마친다.</a:t>
+            </a:r>
+          </a:p>
+        </p:txBody>
+      </p:sp>
+      <p:sp>
+        <p:nvSpPr>
+          <p:cNvPr id="4" name="Slide Number Placeholder 3"/>
+          <p:cNvSpPr>
+            <a:spLocks noGrp="1"/>
+          </p:cNvSpPr>
+          <p:nvPr>
+            <p:ph type="sldNum" idx="5" sz="quarter"/>
+          </p:nvPr>
+        </p:nvSpPr>
+        <p:spPr/>
+      </p:sp>
+    </p:spTree>
+  </p:cSld>
+  <p:clrMapOvr>
+    <a:masterClrMapping/>
+  </p:clrMapOvr>
+</p:notes>
+</file>
+
+<file path=ppt/notesSlides/notesSlide27.xml><?xml version="1.0" encoding="utf-8"?>
+<p:notes xmlns:a="http://schemas.openxmlformats.org/drawingml/2006/main" xmlns:p="http://schemas.openxmlformats.org/presentationml/2006/main" xmlns:r="http://schemas.openxmlformats.org/officeDocument/2006/relationships">
+  <p:cSld>
+    <p:spTree>
+      <p:nvGrpSpPr>
+        <p:cNvPr id="1" name=""/>
+        <p:cNvGrpSpPr/>
+        <p:nvPr/>
+      </p:nvGrpSpPr>
+      <p:grpSpPr>
+        <a:xfrm>
+          <a:off x="0" y="0"/>
+          <a:ext cx="0" cy="0"/>
+          <a:chOff x="0" y="0"/>
+          <a:chExt cx="0" cy="0"/>
+        </a:xfrm>
+      </p:grpSpPr>
+      <p:sp>
+        <p:nvSpPr>
+          <p:cNvPr id="2" name="Slide Image Placeholder 1"/>
+          <p:cNvSpPr>
+            <a:spLocks noGrp="1"/>
+          </p:cNvSpPr>
+          <p:nvPr>
+            <p:ph type="sldImg" idx="2"/>
+          </p:nvPr>
+        </p:nvSpPr>
+        <p:spPr/>
+      </p:sp>
+      <p:sp>
+        <p:nvSpPr>
+          <p:cNvPr id="3" name="Notes Placeholder 2"/>
+          <p:cNvSpPr>
+            <a:spLocks noGrp="1"/>
+          </p:cNvSpPr>
+          <p:nvPr>
+            <p:ph type="body" idx="3" sz="quarter"/>
+          </p:nvPr>
+        </p:nvSpPr>
+        <p:spPr/>
+        <p:txBody>
+          <a:bodyPr/>
+          <a:lstStyle/>
+          <a:p>
+            <a:r>
               <a:t>과목별 첫 실습 내용은 각 과목 덱에서 이어 안내한다.</a:t>
             </a:r>
           </a:p>
@@ -1509,7 +1935,7 @@
           <a:lstStyle/>
           <a:p>
             <a:r>
-              <a:t>네 가지가 각자 노트북에서 확인되어야 다음 시간 실습이 나간다. 마지막 항목은 설치가 아니라 소개다.</a:t>
+              <a:t>네 가지가 각자 노트북에서 확인되어야 다음 시간 실습이 나간다. 세 번째와 네 번째가 오늘의 무게 중심이다.</a:t>
             </a:r>
           </a:p>
         </p:txBody>
@@ -1719,7 +2145,7 @@
           <a:lstStyle/>
           <a:p>
             <a:r>
-              <a:t>가상환경은 과목마다 하나씩 만든다. 프롬프트 앞에 .venv 표시가 붙으면 활성화된 것이다. 윈도우에서 실행 정책 오류가 나면 Set-ExecutionPolicy -Scope CurrentUser RemoteSigned를 한 번 실행한다.</a:t>
+              <a:t>가상환경은 과목마다 하나씩 만든다. 프롬프트 앞에 .venv 표시가 나오면 활성화된 것이다. 윈도우에서 실행 정책 오류가 나면 Set-ExecutionPolicy -Scope CurrentUser RemoteSigned를 한 번 실행한다.</a:t>
             </a:r>
           </a:p>
         </p:txBody>
@@ -7323,7 +7749,7 @@
           <a:lstStyle/>
           <a:p>
             <a:r>
-              <a:t>에이전트와 함께 하는 환경 세팅</a:t>
+              <a:t>권한 모드와 실행</a:t>
             </a:r>
           </a:p>
         </p:txBody>
@@ -7375,7 +7801,7 @@
               <a:t>4.2  </a:t>
             </a:r>
             <a:r>
-              <a:t>첫 지시 문장</a:t>
+              <a:t>권한 모드 세 단계</a:t>
             </a:r>
           </a:p>
           <a:p>
@@ -7393,7 +7819,7 @@
               <a:t>4.3  </a:t>
             </a:r>
             <a:r>
-              <a:t>에이전트가 대신 못 하는 것</a:t>
+              <a:t>권한을 여는 조건</a:t>
             </a:r>
           </a:p>
           <a:p>
@@ -7411,7 +7837,25 @@
               <a:t>4.4  </a:t>
             </a:r>
             <a:r>
-              <a:t>결과 확인 항목</a:t>
+              <a:t>첫 지시 문장</a:t>
+            </a:r>
+          </a:p>
+          <a:p>
+            <a:pPr>
+              <a:spcAft>
+                <a:spcPts val="1000"/>
+              </a:spcAft>
+            </a:pPr>
+            <a:r>
+              <a:rPr>
+                <a:solidFill>
+                  <a:srgbClr val="AFAFAF"/>
+                </a:solidFill>
+              </a:rPr>
+              <a:t>4.5  </a:t>
+            </a:r>
+            <a:r>
+              <a:t>사람이 확인하는 것</a:t>
             </a:r>
           </a:p>
         </p:txBody>
@@ -7471,7 +7915,7 @@
           <a:lstStyle/>
           <a:p>
             <a:r>
-              <a:t>4. 에이전트와 함께 하는 환경 세팅</a:t>
+              <a:t>4. 권한 모드와 실행</a:t>
             </a:r>
           </a:p>
         </p:txBody>
@@ -7598,7 +8042,7 @@
           <a:lstStyle/>
           <a:p>
             <a:r>
-              <a:t>4.2 첫 지시 문장</a:t>
+              <a:t>4.2 권한 모드 세 단계</a:t>
             </a:r>
           </a:p>
         </p:txBody>
@@ -7619,7 +8063,7 @@
           <a:lstStyle/>
           <a:p>
             <a:r>
-              <a:t>4. 에이전트와 함께 하는 환경 세팅</a:t>
+              <a:t>4. 권한 모드와 실행</a:t>
             </a:r>
           </a:p>
         </p:txBody>
@@ -7641,29 +8085,648 @@
           <a:p>
             <a:pPr/>
             <a:r>
-              <a:t>지시 예시: 이 폴더의 requirements.txt로 가상환경을 만들고 설치, 실패 시 오류 원문과 원인 보고</a:t>
+              <a:t>전환: Claude Code는 Shift+Tab 순환, Codex는 /approvals, Antigravity는 설정 화면</a:t>
             </a:r>
           </a:p>
           <a:p>
             <a:pPr/>
             <a:r>
-              <a:t>오류 전달 방식: 화면 캡처가 아니라 터미널 출력 원문</a:t>
+              <a:t>시작 옵션: claude --dangerously-skip-permissions · codex --yolo</a:t>
             </a:r>
           </a:p>
           <a:p>
             <a:pPr/>
             <a:r>
-              <a:t>한 번에 한 가지 — 설치와 분석을 한 지시에 섞지 않기</a:t>
-            </a:r>
-          </a:p>
-          <a:p>
-            <a:pPr/>
-            <a:r>
-              <a:t>실행 전 확인: 무엇을 바꿀 것인지 먼저 말하게 하기</a:t>
-            </a:r>
-          </a:p>
-        </p:txBody>
-      </p:sp>
+              <a:t>계획 먼저: Claude Code plan 모드 — 파일을 고치지 않고 계획만 제시</a:t>
+            </a:r>
+          </a:p>
+        </p:txBody>
+      </p:sp>
+      <p:sp>
+        <p:nvSpPr>
+          <p:cNvPr id="5" name="Text Placeholder 4"/>
+          <p:cNvSpPr>
+            <a:spLocks noGrp="1"/>
+          </p:cNvSpPr>
+          <p:nvPr>
+            <p:ph type="body" idx="103"/>
+          </p:nvPr>
+        </p:nvSpPr>
+        <p:spPr/>
+        <p:txBody>
+          <a:bodyPr/>
+          <a:lstStyle/>
+          <a:p>
+            <a:r>
+              <a:t>표 2. 도구별 권한 단계와 설정 이름</a:t>
+            </a:r>
+          </a:p>
+        </p:txBody>
+      </p:sp>
+      <p:graphicFrame>
+        <p:nvGraphicFramePr>
+          <p:cNvPr id="6" name="Table Placeholder 5"/>
+          <p:cNvGraphicFramePr>
+            <a:graphicFrameLocks noGrp="1"/>
+          </p:cNvGraphicFramePr>
+          <p:nvPr>
+            <p:ph type="tbl" idx="104"/>
+          </p:nvPr>
+        </p:nvGraphicFramePr>
+        <p:xfrm>
+          <a:off x="4937760" y="1828800"/>
+          <a:ext cx="6565392" cy="2311400"/>
+        </p:xfrm>
+        <a:graphic>
+          <a:graphicData uri="http://schemas.openxmlformats.org/drawingml/2006/table">
+            <a:tbl>
+              <a:tblPr firstRow="0" bandRow="0" firstCol="0" lastRow="0" lastCol="0" bandCol="0"/>
+              <a:tblGrid>
+                <a:gridCol w="1641348"/>
+                <a:gridCol w="1641348"/>
+                <a:gridCol w="1641348"/>
+                <a:gridCol w="1641348"/>
+              </a:tblGrid>
+              <a:tr h="406400">
+                <a:tc>
+                  <a:txBody>
+                    <a:bodyPr/>
+                    <a:lstStyle/>
+                    <a:p>
+                      <a:r>
+                        <a:rPr sz="1300" b="0">
+                          <a:solidFill>
+                            <a:srgbClr val="FFFFFF"/>
+                          </a:solidFill>
+                          <a:latin typeface="Pretendard Medium"/>
+                        </a:rPr>
+                        <a:t>도구</a:t>
+                      </a:r>
+                    </a:p>
+                  </a:txBody>
+                  <a:tcPr marL="101600" marR="101600" marT="76200" marB="76200" anchor="ctr">
+                    <a:solidFill>
+                      <a:srgbClr val="000000"/>
+                    </a:solidFill>
+                    <a:lnL w="0">
+                      <a:noFill/>
+                    </a:lnL>
+                    <a:lnR w="0">
+                      <a:noFill/>
+                    </a:lnR>
+                    <a:lnT w="0">
+                      <a:noFill/>
+                    </a:lnT>
+                    <a:lnB w="0">
+                      <a:noFill/>
+                    </a:lnB>
+                  </a:tcPr>
+                </a:tc>
+                <a:tc>
+                  <a:txBody>
+                    <a:bodyPr/>
+                    <a:lstStyle/>
+                    <a:p>
+                      <a:r>
+                        <a:rPr sz="1300" b="0">
+                          <a:solidFill>
+                            <a:srgbClr val="FFFFFF"/>
+                          </a:solidFill>
+                          <a:latin typeface="Pretendard Medium"/>
+                        </a:rPr>
+                        <a:t>매번 승인</a:t>
+                      </a:r>
+                    </a:p>
+                  </a:txBody>
+                  <a:tcPr marL="101600" marR="101600" marT="76200" marB="76200" anchor="ctr">
+                    <a:solidFill>
+                      <a:srgbClr val="000000"/>
+                    </a:solidFill>
+                    <a:lnL w="0">
+                      <a:noFill/>
+                    </a:lnL>
+                    <a:lnR w="0">
+                      <a:noFill/>
+                    </a:lnR>
+                    <a:lnT w="0">
+                      <a:noFill/>
+                    </a:lnT>
+                    <a:lnB w="0">
+                      <a:noFill/>
+                    </a:lnB>
+                  </a:tcPr>
+                </a:tc>
+                <a:tc>
+                  <a:txBody>
+                    <a:bodyPr/>
+                    <a:lstStyle/>
+                    <a:p>
+                      <a:r>
+                        <a:rPr sz="1300" b="0">
+                          <a:solidFill>
+                            <a:srgbClr val="FFFFFF"/>
+                          </a:solidFill>
+                          <a:latin typeface="Pretendard Medium"/>
+                        </a:rPr>
+                        <a:t>부분 자동</a:t>
+                      </a:r>
+                    </a:p>
+                  </a:txBody>
+                  <a:tcPr marL="101600" marR="101600" marT="76200" marB="76200" anchor="ctr">
+                    <a:solidFill>
+                      <a:srgbClr val="000000"/>
+                    </a:solidFill>
+                    <a:lnL w="0">
+                      <a:noFill/>
+                    </a:lnL>
+                    <a:lnR w="0">
+                      <a:noFill/>
+                    </a:lnR>
+                    <a:lnT w="0">
+                      <a:noFill/>
+                    </a:lnT>
+                    <a:lnB w="0">
+                      <a:noFill/>
+                    </a:lnB>
+                  </a:tcPr>
+                </a:tc>
+                <a:tc>
+                  <a:txBody>
+                    <a:bodyPr/>
+                    <a:lstStyle/>
+                    <a:p>
+                      <a:r>
+                        <a:rPr sz="1300" b="0">
+                          <a:solidFill>
+                            <a:srgbClr val="FFFFFF"/>
+                          </a:solidFill>
+                          <a:latin typeface="Pretendard Medium"/>
+                        </a:rPr>
+                        <a:t>전면 자동</a:t>
+                      </a:r>
+                    </a:p>
+                  </a:txBody>
+                  <a:tcPr marL="101600" marR="101600" marT="76200" marB="76200" anchor="ctr">
+                    <a:solidFill>
+                      <a:srgbClr val="000000"/>
+                    </a:solidFill>
+                    <a:lnL w="0">
+                      <a:noFill/>
+                    </a:lnL>
+                    <a:lnR w="0">
+                      <a:noFill/>
+                    </a:lnR>
+                    <a:lnT w="0">
+                      <a:noFill/>
+                    </a:lnT>
+                    <a:lnB w="0">
+                      <a:noFill/>
+                    </a:lnB>
+                  </a:tcPr>
+                </a:tc>
+              </a:tr>
+              <a:tr h="635000">
+                <a:tc>
+                  <a:txBody>
+                    <a:bodyPr/>
+                    <a:lstStyle/>
+                    <a:p>
+                      <a:r>
+                        <a:rPr sz="1300" b="1">
+                          <a:solidFill>
+                            <a:srgbClr val="000000"/>
+                          </a:solidFill>
+                          <a:latin typeface="Pretendard"/>
+                        </a:rPr>
+                        <a:t>Claude Code</a:t>
+                      </a:r>
+                    </a:p>
+                  </a:txBody>
+                  <a:tcPr marL="101600" marR="101600" marT="101600" marB="101600" anchor="ctr">
+                    <a:solidFill>
+                      <a:srgbClr val="FFFFFF"/>
+                    </a:solidFill>
+                    <a:lnL w="0">
+                      <a:noFill/>
+                    </a:lnL>
+                    <a:lnR w="0">
+                      <a:noFill/>
+                    </a:lnR>
+                    <a:lnT w="0">
+                      <a:noFill/>
+                    </a:lnT>
+                    <a:lnB w="9525">
+                      <a:solidFill>
+                        <a:srgbClr val="E2E2E2"/>
+                      </a:solidFill>
+                    </a:lnB>
+                  </a:tcPr>
+                </a:tc>
+                <a:tc>
+                  <a:txBody>
+                    <a:bodyPr/>
+                    <a:lstStyle/>
+                    <a:p>
+                      <a:r>
+                        <a:rPr sz="1300" b="0">
+                          <a:solidFill>
+                            <a:srgbClr val="5E5E5E"/>
+                          </a:solidFill>
+                          <a:latin typeface="Pretendard Medium"/>
+                        </a:rPr>
+                        <a:t>기본 모드</a:t>
+                      </a:r>
+                    </a:p>
+                  </a:txBody>
+                  <a:tcPr marL="101600" marR="101600" marT="101600" marB="101600" anchor="ctr">
+                    <a:solidFill>
+                      <a:srgbClr val="FFFFFF"/>
+                    </a:solidFill>
+                    <a:lnL w="0">
+                      <a:noFill/>
+                    </a:lnL>
+                    <a:lnR w="0">
+                      <a:noFill/>
+                    </a:lnR>
+                    <a:lnT w="0">
+                      <a:noFill/>
+                    </a:lnT>
+                    <a:lnB w="9525">
+                      <a:solidFill>
+                        <a:srgbClr val="E2E2E2"/>
+                      </a:solidFill>
+                    </a:lnB>
+                  </a:tcPr>
+                </a:tc>
+                <a:tc>
+                  <a:txBody>
+                    <a:bodyPr/>
+                    <a:lstStyle/>
+                    <a:p>
+                      <a:r>
+                        <a:rPr sz="1300" b="0">
+                          <a:solidFill>
+                            <a:srgbClr val="5E5E5E"/>
+                          </a:solidFill>
+                          <a:latin typeface="Pretendard Medium"/>
+                        </a:rPr>
+                        <a:t>acceptEdits</a:t>
+                      </a:r>
+                    </a:p>
+                  </a:txBody>
+                  <a:tcPr marL="101600" marR="101600" marT="101600" marB="101600" anchor="ctr">
+                    <a:solidFill>
+                      <a:srgbClr val="FFFFFF"/>
+                    </a:solidFill>
+                    <a:lnL w="0">
+                      <a:noFill/>
+                    </a:lnL>
+                    <a:lnR w="0">
+                      <a:noFill/>
+                    </a:lnR>
+                    <a:lnT w="0">
+                      <a:noFill/>
+                    </a:lnT>
+                    <a:lnB w="9525">
+                      <a:solidFill>
+                        <a:srgbClr val="E2E2E2"/>
+                      </a:solidFill>
+                    </a:lnB>
+                  </a:tcPr>
+                </a:tc>
+                <a:tc>
+                  <a:txBody>
+                    <a:bodyPr/>
+                    <a:lstStyle/>
+                    <a:p>
+                      <a:r>
+                        <a:rPr sz="1300" b="0">
+                          <a:solidFill>
+                            <a:srgbClr val="5E5E5E"/>
+                          </a:solidFill>
+                          <a:latin typeface="Pretendard Medium"/>
+                        </a:rPr>
+                        <a:t>bypassPermissions</a:t>
+                      </a:r>
+                    </a:p>
+                  </a:txBody>
+                  <a:tcPr marL="101600" marR="101600" marT="101600" marB="101600" anchor="ctr">
+                    <a:solidFill>
+                      <a:srgbClr val="FFFFFF"/>
+                    </a:solidFill>
+                    <a:lnL w="0">
+                      <a:noFill/>
+                    </a:lnL>
+                    <a:lnR w="0">
+                      <a:noFill/>
+                    </a:lnR>
+                    <a:lnT w="0">
+                      <a:noFill/>
+                    </a:lnT>
+                    <a:lnB w="9525">
+                      <a:solidFill>
+                        <a:srgbClr val="E2E2E2"/>
+                      </a:solidFill>
+                    </a:lnB>
+                  </a:tcPr>
+                </a:tc>
+              </a:tr>
+              <a:tr h="635000">
+                <a:tc>
+                  <a:txBody>
+                    <a:bodyPr/>
+                    <a:lstStyle/>
+                    <a:p>
+                      <a:r>
+                        <a:rPr sz="1300" b="1">
+                          <a:solidFill>
+                            <a:srgbClr val="000000"/>
+                          </a:solidFill>
+                          <a:latin typeface="Pretendard"/>
+                        </a:rPr>
+                        <a:t>Codex</a:t>
+                      </a:r>
+                    </a:p>
+                  </a:txBody>
+                  <a:tcPr marL="101600" marR="101600" marT="101600" marB="101600" anchor="ctr">
+                    <a:solidFill>
+                      <a:srgbClr val="FFFFFF"/>
+                    </a:solidFill>
+                    <a:lnL w="0">
+                      <a:noFill/>
+                    </a:lnL>
+                    <a:lnR w="0">
+                      <a:noFill/>
+                    </a:lnR>
+                    <a:lnT w="0">
+                      <a:noFill/>
+                    </a:lnT>
+                    <a:lnB w="9525">
+                      <a:solidFill>
+                        <a:srgbClr val="E2E2E2"/>
+                      </a:solidFill>
+                    </a:lnB>
+                  </a:tcPr>
+                </a:tc>
+                <a:tc>
+                  <a:txBody>
+                    <a:bodyPr/>
+                    <a:lstStyle/>
+                    <a:p>
+                      <a:r>
+                        <a:rPr sz="1300" b="0">
+                          <a:solidFill>
+                            <a:srgbClr val="5E5E5E"/>
+                          </a:solidFill>
+                          <a:latin typeface="Pretendard Medium"/>
+                        </a:rPr>
+                        <a:t>ask-for-approval</a:t>
+                      </a:r>
+                    </a:p>
+                  </a:txBody>
+                  <a:tcPr marL="101600" marR="101600" marT="101600" marB="101600" anchor="ctr">
+                    <a:solidFill>
+                      <a:srgbClr val="FFFFFF"/>
+                    </a:solidFill>
+                    <a:lnL w="0">
+                      <a:noFill/>
+                    </a:lnL>
+                    <a:lnR w="0">
+                      <a:noFill/>
+                    </a:lnR>
+                    <a:lnT w="0">
+                      <a:noFill/>
+                    </a:lnT>
+                    <a:lnB w="9525">
+                      <a:solidFill>
+                        <a:srgbClr val="E2E2E2"/>
+                      </a:solidFill>
+                    </a:lnB>
+                  </a:tcPr>
+                </a:tc>
+                <a:tc>
+                  <a:txBody>
+                    <a:bodyPr/>
+                    <a:lstStyle/>
+                    <a:p>
+                      <a:r>
+                        <a:rPr sz="1300" b="0">
+                          <a:solidFill>
+                            <a:srgbClr val="5E5E5E"/>
+                          </a:solidFill>
+                          <a:latin typeface="Pretendard Medium"/>
+                        </a:rPr>
+                        <a:t>full-auto</a:t>
+                      </a:r>
+                    </a:p>
+                  </a:txBody>
+                  <a:tcPr marL="101600" marR="101600" marT="101600" marB="101600" anchor="ctr">
+                    <a:solidFill>
+                      <a:srgbClr val="FFFFFF"/>
+                    </a:solidFill>
+                    <a:lnL w="0">
+                      <a:noFill/>
+                    </a:lnL>
+                    <a:lnR w="0">
+                      <a:noFill/>
+                    </a:lnR>
+                    <a:lnT w="0">
+                      <a:noFill/>
+                    </a:lnT>
+                    <a:lnB w="9525">
+                      <a:solidFill>
+                        <a:srgbClr val="E2E2E2"/>
+                      </a:solidFill>
+                    </a:lnB>
+                  </a:tcPr>
+                </a:tc>
+                <a:tc>
+                  <a:txBody>
+                    <a:bodyPr/>
+                    <a:lstStyle/>
+                    <a:p>
+                      <a:r>
+                        <a:rPr sz="1300" b="0">
+                          <a:solidFill>
+                            <a:srgbClr val="5E5E5E"/>
+                          </a:solidFill>
+                          <a:latin typeface="Pretendard Medium"/>
+                        </a:rPr>
+                        <a:t>yolo</a:t>
+                      </a:r>
+                    </a:p>
+                  </a:txBody>
+                  <a:tcPr marL="101600" marR="101600" marT="101600" marB="101600" anchor="ctr">
+                    <a:solidFill>
+                      <a:srgbClr val="FFFFFF"/>
+                    </a:solidFill>
+                    <a:lnL w="0">
+                      <a:noFill/>
+                    </a:lnL>
+                    <a:lnR w="0">
+                      <a:noFill/>
+                    </a:lnR>
+                    <a:lnT w="0">
+                      <a:noFill/>
+                    </a:lnT>
+                    <a:lnB w="9525">
+                      <a:solidFill>
+                        <a:srgbClr val="E2E2E2"/>
+                      </a:solidFill>
+                    </a:lnB>
+                  </a:tcPr>
+                </a:tc>
+              </a:tr>
+              <a:tr h="635000">
+                <a:tc>
+                  <a:txBody>
+                    <a:bodyPr/>
+                    <a:lstStyle/>
+                    <a:p>
+                      <a:r>
+                        <a:rPr sz="1300" b="1">
+                          <a:solidFill>
+                            <a:srgbClr val="000000"/>
+                          </a:solidFill>
+                          <a:latin typeface="Pretendard"/>
+                        </a:rPr>
+                        <a:t>Antigravity</a:t>
+                      </a:r>
+                    </a:p>
+                  </a:txBody>
+                  <a:tcPr marL="101600" marR="101600" marT="101600" marB="101600" anchor="ctr">
+                    <a:solidFill>
+                      <a:srgbClr val="FFFFFF"/>
+                    </a:solidFill>
+                    <a:lnL w="0">
+                      <a:noFill/>
+                    </a:lnL>
+                    <a:lnR w="0">
+                      <a:noFill/>
+                    </a:lnR>
+                    <a:lnT w="0">
+                      <a:noFill/>
+                    </a:lnT>
+                    <a:lnB w="9525">
+                      <a:solidFill>
+                        <a:srgbClr val="E2E2E2"/>
+                      </a:solidFill>
+                    </a:lnB>
+                  </a:tcPr>
+                </a:tc>
+                <a:tc>
+                  <a:txBody>
+                    <a:bodyPr/>
+                    <a:lstStyle/>
+                    <a:p>
+                      <a:r>
+                        <a:rPr sz="1300" b="0">
+                          <a:solidFill>
+                            <a:srgbClr val="5E5E5E"/>
+                          </a:solidFill>
+                          <a:latin typeface="Pretendard Medium"/>
+                        </a:rPr>
+                        <a:t>Request Review</a:t>
+                      </a:r>
+                    </a:p>
+                  </a:txBody>
+                  <a:tcPr marL="101600" marR="101600" marT="101600" marB="101600" anchor="ctr">
+                    <a:solidFill>
+                      <a:srgbClr val="FFFFFF"/>
+                    </a:solidFill>
+                    <a:lnL w="0">
+                      <a:noFill/>
+                    </a:lnL>
+                    <a:lnR w="0">
+                      <a:noFill/>
+                    </a:lnR>
+                    <a:lnT w="0">
+                      <a:noFill/>
+                    </a:lnT>
+                    <a:lnB w="9525">
+                      <a:solidFill>
+                        <a:srgbClr val="E2E2E2"/>
+                      </a:solidFill>
+                    </a:lnB>
+                  </a:tcPr>
+                </a:tc>
+                <a:tc>
+                  <a:txBody>
+                    <a:bodyPr/>
+                    <a:lstStyle/>
+                    <a:p>
+                      <a:r>
+                        <a:rPr sz="1300" b="0">
+                          <a:solidFill>
+                            <a:srgbClr val="5E5E5E"/>
+                          </a:solidFill>
+                          <a:latin typeface="Pretendard Medium"/>
+                        </a:rPr>
+                        <a:t>Proceed in Sandbox</a:t>
+                      </a:r>
+                    </a:p>
+                  </a:txBody>
+                  <a:tcPr marL="101600" marR="101600" marT="101600" marB="101600" anchor="ctr">
+                    <a:solidFill>
+                      <a:srgbClr val="FFFFFF"/>
+                    </a:solidFill>
+                    <a:lnL w="0">
+                      <a:noFill/>
+                    </a:lnL>
+                    <a:lnR w="0">
+                      <a:noFill/>
+                    </a:lnR>
+                    <a:lnT w="0">
+                      <a:noFill/>
+                    </a:lnT>
+                    <a:lnB w="9525">
+                      <a:solidFill>
+                        <a:srgbClr val="E2E2E2"/>
+                      </a:solidFill>
+                    </a:lnB>
+                  </a:tcPr>
+                </a:tc>
+                <a:tc>
+                  <a:txBody>
+                    <a:bodyPr/>
+                    <a:lstStyle/>
+                    <a:p>
+                      <a:r>
+                        <a:rPr sz="1300" b="0">
+                          <a:solidFill>
+                            <a:srgbClr val="5E5E5E"/>
+                          </a:solidFill>
+                          <a:latin typeface="Pretendard Medium"/>
+                        </a:rPr>
+                        <a:t>Always Proceed</a:t>
+                      </a:r>
+                    </a:p>
+                  </a:txBody>
+                  <a:tcPr marL="101600" marR="101600" marT="101600" marB="101600" anchor="ctr">
+                    <a:solidFill>
+                      <a:srgbClr val="FFFFFF"/>
+                    </a:solidFill>
+                    <a:lnL w="0">
+                      <a:noFill/>
+                    </a:lnL>
+                    <a:lnR w="0">
+                      <a:noFill/>
+                    </a:lnR>
+                    <a:lnT w="0">
+                      <a:noFill/>
+                    </a:lnT>
+                    <a:lnB w="9525">
+                      <a:solidFill>
+                        <a:srgbClr val="E2E2E2"/>
+                      </a:solidFill>
+                    </a:lnB>
+                  </a:tcPr>
+                </a:tc>
+              </a:tr>
+            </a:tbl>
+          </a:graphicData>
+        </a:graphic>
+      </p:graphicFrame>
       <p:sp>
         <p:nvSpPr>
           <p:cNvPr id="25" name="Slide Number Placeholder 0"/>
@@ -7706,7 +8769,7 @@
             <a:pPr algn="r"/>
             <a:fld id="{F7021451-1387-4CA6-816F-3879F97B5CBC}" type="slidenum">
               <a:rPr b="0" lang="en-US"/>
-              <a:t>1004</a:t>
+              <a:t>1008</a:t>
             </a:fld>
             <a:endParaRPr lang="en-US"/>
           </a:p>
@@ -8174,7 +9237,7 @@
                           </a:solidFill>
                           <a:latin typeface="Pretendard"/>
                         </a:rPr>
-                        <a:t>에이전트와 함께 하는 환경 세팅</a:t>
+                        <a:t>권한 모드와 실행</a:t>
                       </a:r>
                     </a:p>
                   </a:txBody>
@@ -8210,7 +9273,7 @@
                           </a:solidFill>
                           <a:latin typeface="Pretendard Medium"/>
                         </a:rPr>
-                        <a:t>4.1 에이전트를 여는 위치  ·  4.2 첫 지시 문장  ·  4.3 에이전트가 대신 못 하는 것  ·  4.4 결과 확인 항목</a:t>
+                        <a:t>4.1 에이전트를 여는 위치  ·  4.2 권한 모드 세 단계  ·  4.3 권한을 여는 조건  ·  4.4 첫 지시 문장  ·  4.5 사람이 확인하는 것</a:t>
                       </a:r>
                     </a:p>
                   </a:txBody>
@@ -8284,7 +9347,7 @@
                           </a:solidFill>
                           <a:latin typeface="Pretendard"/>
                         </a:rPr>
-                        <a:t>여러 에이전트 병렬 실행</a:t>
+                        <a:t>명령어와 토큰</a:t>
                       </a:r>
                     </a:p>
                   </a:txBody>
@@ -8320,7 +9383,7 @@
                           </a:solidFill>
                           <a:latin typeface="Pretendard Medium"/>
                         </a:rPr>
-                        <a:t>5.1 Orca  ·  5.2 병렬 실행이 필요한 시점</a:t>
+                        <a:t>5.1 자주 쓰는 명령  ·  5.2 대화를 비우는 기준  ·  5.3 모델 선택  ·  5.4 md 파일로 남기는 맥락  ·  5.5 토큰을 아끼는 습관</a:t>
                       </a:r>
                     </a:p>
                   </a:txBody>
@@ -8394,7 +9457,7 @@
                           </a:solidFill>
                           <a:latin typeface="Pretendard"/>
                         </a:rPr>
-                        <a:t>정리</a:t>
+                        <a:t>병렬 실행과 정리</a:t>
                       </a:r>
                     </a:p>
                   </a:txBody>
@@ -8430,7 +9493,7 @@
                           </a:solidFill>
                           <a:latin typeface="Pretendard Medium"/>
                         </a:rPr>
-                        <a:t>6.1 설치 확인 목록  ·  6.2 오늘의 정리  ·  6.3 다음 시간</a:t>
+                        <a:t>6.1 Orca  ·  6.2 병렬 실행이 필요한 시점  ·  6.3 설치 확인 목록  ·  6.4 오늘의 정리  ·  6.5 다음 시간</a:t>
                       </a:r>
                     </a:p>
                   </a:txBody>
@@ -8541,7 +9604,7 @@
           <a:lstStyle/>
           <a:p>
             <a:r>
-              <a:t>4.3 에이전트가 대신 못 하는 것</a:t>
+              <a:t>4.3 권한을 여는 조건</a:t>
             </a:r>
           </a:p>
         </p:txBody>
@@ -8562,7 +9625,7 @@
           <a:lstStyle/>
           <a:p>
             <a:r>
-              <a:t>4. 에이전트와 함께 하는 환경 세팅</a:t>
+              <a:t>4. 권한 모드와 실행</a:t>
             </a:r>
           </a:p>
         </p:txBody>
@@ -8584,25 +9647,25 @@
           <a:p>
             <a:pPr/>
             <a:r>
-              <a:t>데이터의 의미와 결과의 타당성 판단</a:t>
+              <a:t>조건 1: 깃 저장소이고 방금 커밋한 상태 — 되돌릴 수 있음</a:t>
             </a:r>
           </a:p>
           <a:p>
             <a:pPr/>
             <a:r>
-              <a:t>과목 규칙 — 제출 형식, 마감, 허용 범위</a:t>
+              <a:t>조건 2: 과제나 실습 폴더 — 개인 자료와 자격증명이 없는 곳</a:t>
             </a:r>
           </a:p>
           <a:p>
             <a:pPr/>
             <a:r>
-              <a:t>무엇이 실제로 바뀌었는지 확인 (git status, 파일 목록)</a:t>
+              <a:t>조건 3: 결과를 어떻게 확인할지 정해 둔 상태</a:t>
             </a:r>
           </a:p>
           <a:p>
             <a:pPr/>
             <a:r>
-              <a:t>책임: 제출물의 정확성은 제출한 학생</a:t>
+              <a:t>금지: 홈 폴더, 연구실 공용 저장소, 자격증명이 있는 폴더</a:t>
             </a:r>
           </a:p>
         </p:txBody>
@@ -8689,7 +9752,7 @@
           <a:lstStyle/>
           <a:p>
             <a:r>
-              <a:t>4.4 결과 확인 항목</a:t>
+              <a:t>4.4 첫 지시 문장</a:t>
             </a:r>
           </a:p>
         </p:txBody>
@@ -8710,7 +9773,7 @@
           <a:lstStyle/>
           <a:p>
             <a:r>
-              <a:t>4. 에이전트와 함께 하는 환경 세팅</a:t>
+              <a:t>4. 권한 모드와 실행</a:t>
             </a:r>
           </a:p>
         </p:txBody>
@@ -8732,25 +9795,25 @@
           <a:p>
             <a:pPr/>
             <a:r>
-              <a:t>행 수: 읽어들인 결과가 원본 파일과 일치</a:t>
+              <a:t>지시 예시: 이 폴더의 requirements.txt로 가상환경을 만들고 설치, 실패 시 오류 원문과 원인 보고</a:t>
             </a:r>
           </a:p>
           <a:p>
             <a:pPr/>
             <a:r>
-              <a:t>결측: 삭제인지 대체인지, 대체면 어떤 값인지</a:t>
+              <a:t>오류 전달 방식: 화면 캡처가 아니라 터미널 출력 원문</a:t>
             </a:r>
           </a:p>
           <a:p>
             <a:pPr/>
             <a:r>
-              <a:t>필터: 조건이 의도한 범위와 일치</a:t>
+              <a:t>한 번에 한 가지 — 설치와 분석을 한 지시에 섞지 않기</a:t>
             </a:r>
           </a:p>
           <a:p>
             <a:pPr/>
             <a:r>
-              <a:t>확인 없이 넘어간 코드가 오차의 출처</a:t>
+              <a:t>실행 전 확인: 무엇을 바꿀 것인지 먼저 말하게 하기</a:t>
             </a:r>
           </a:p>
         </p:txBody>
@@ -8823,42 +9886,42 @@
       <p:grpSpPr/>
       <p:sp>
         <p:nvSpPr>
-          <p:cNvPr id="2" name="Text Placeholder 1"/>
-          <p:cNvSpPr>
-            <a:spLocks noGrp="1"/>
-          </p:cNvSpPr>
-          <p:nvPr>
-            <p:ph type="body" idx="100"/>
-          </p:nvPr>
-        </p:nvSpPr>
-        <p:spPr/>
-        <p:txBody>
-          <a:bodyPr/>
-          <a:lstStyle/>
-          <a:p>
-            <a:r>
-              <a:t>05</a:t>
-            </a:r>
-          </a:p>
-        </p:txBody>
-      </p:sp>
-      <p:sp>
-        <p:nvSpPr>
-          <p:cNvPr id="3" name="Title 2"/>
-          <p:cNvSpPr>
-            <a:spLocks noGrp="1"/>
-          </p:cNvSpPr>
-          <p:nvPr>
-            <p:ph type="title" idx="101"/>
-          </p:nvPr>
-        </p:nvSpPr>
-        <p:spPr/>
-        <p:txBody>
-          <a:bodyPr/>
-          <a:lstStyle/>
-          <a:p>
-            <a:r>
-              <a:t>여러 에이전트 병렬 실행</a:t>
+          <p:cNvPr id="2" name="Title 1"/>
+          <p:cNvSpPr>
+            <a:spLocks noGrp="1"/>
+          </p:cNvSpPr>
+          <p:nvPr>
+            <p:ph type="title" idx="100"/>
+          </p:nvPr>
+        </p:nvSpPr>
+        <p:spPr/>
+        <p:txBody>
+          <a:bodyPr/>
+          <a:lstStyle/>
+          <a:p>
+            <a:r>
+              <a:t>4.5 사람이 확인하는 것</a:t>
+            </a:r>
+          </a:p>
+        </p:txBody>
+      </p:sp>
+      <p:sp>
+        <p:nvSpPr>
+          <p:cNvPr id="3" name="Text Placeholder 2"/>
+          <p:cNvSpPr>
+            <a:spLocks noGrp="1"/>
+          </p:cNvSpPr>
+          <p:nvPr>
+            <p:ph type="body" idx="101"/>
+          </p:nvPr>
+        </p:nvSpPr>
+        <p:spPr/>
+        <p:txBody>
+          <a:bodyPr/>
+          <a:lstStyle/>
+          <a:p>
+            <a:r>
+              <a:t>4. 권한 모드와 실행</a:t>
             </a:r>
           </a:p>
         </p:txBody>
@@ -8878,40 +9941,76 @@
           <a:bodyPr/>
           <a:lstStyle/>
           <a:p>
-            <a:pPr>
-              <a:spcAft>
-                <a:spcPts val="1000"/>
-              </a:spcAft>
-            </a:pPr>
-            <a:r>
-              <a:rPr>
+            <a:pPr/>
+            <a:r>
+              <a:t>행 수: 읽어들인 결과가 원본 파일과 일치</a:t>
+            </a:r>
+          </a:p>
+          <a:p>
+            <a:pPr/>
+            <a:r>
+              <a:t>결측과 필터: 처리 방식과 조건이 의도한 범위와 일치</a:t>
+            </a:r>
+          </a:p>
+          <a:p>
+            <a:pPr/>
+            <a:r>
+              <a:t>변경 범위: git status와 git diff로 실제로 바뀐 파일 확인</a:t>
+            </a:r>
+          </a:p>
+          <a:p>
+            <a:pPr/>
+            <a:r>
+              <a:t>책임: 제출물의 정확성은 제출한 학생</a:t>
+            </a:r>
+          </a:p>
+        </p:txBody>
+      </p:sp>
+      <p:sp>
+        <p:nvSpPr>
+          <p:cNvPr id="25" name="Slide Number Placeholder 0"/>
+          <p:cNvSpPr>
+            <a:spLocks noGrp="1"/>
+          </p:cNvSpPr>
+          <p:nvPr>
+            <p:ph type="sldNum" sz="quarter" idx="4294967295"/>
+          </p:nvPr>
+        </p:nvSpPr>
+        <p:spPr>
+          <a:xfrm>
+            <a:off x="10591495" y="6355080"/>
+            <a:ext cx="914400" cy="274320"/>
+          </a:xfrm>
+          <a:prstGeom prst="rect">
+            <a:avLst/>
+          </a:prstGeom>
+          <a:extLst>
+            <a:ext uri="{C572A759-6A51-4108-AA02-DFA0A04FC94B}">
+              <ma14:wrappingTextBoxFlag xmlns:ma14="http://schemas.microsoft.com/office/mac/drawingml/2011/main" val="0"/>
+            </a:ext>
+          </a:extLst>
+        </p:spPr>
+        <p:txBody>
+          <a:bodyPr/>
+          <a:lstStyle>
+            <a:lvl1pPr>
+              <a:defRPr sz="1000">
                 <a:solidFill>
                   <a:srgbClr val="AFAFAF"/>
                 </a:solidFill>
-              </a:rPr>
-              <a:t>5.1  </a:t>
-            </a:r>
-            <a:r>
-              <a:t>Orca</a:t>
-            </a:r>
-          </a:p>
-          <a:p>
-            <a:pPr>
-              <a:spcAft>
-                <a:spcPts val="1000"/>
-              </a:spcAft>
-            </a:pPr>
-            <a:r>
-              <a:rPr>
-                <a:solidFill>
-                  <a:srgbClr val="AFAFAF"/>
-                </a:solidFill>
-              </a:rPr>
-              <a:t>5.2  </a:t>
-            </a:r>
-            <a:r>
-              <a:t>병렬 실행이 필요한 시점</a:t>
-            </a:r>
+                <a:latin typeface="Pretendard Medium"/>
+                <a:ea typeface="Pretendard Medium"/>
+                <a:cs typeface="Pretendard Medium"/>
+              </a:defRPr>
+            </a:lvl1pPr>
+          </a:lstStyle>
+          <a:p>
+            <a:pPr algn="r"/>
+            <a:fld id="{F7021451-1387-4CA6-816F-3879F97B5CBC}" type="slidenum">
+              <a:rPr b="0" lang="en-US"/>
+              <a:t>1004</a:t>
+            </a:fld>
+            <a:endParaRPr lang="en-US"/>
           </a:p>
         </p:txBody>
       </p:sp>
@@ -8935,42 +10034,42 @@
       <p:grpSpPr/>
       <p:sp>
         <p:nvSpPr>
-          <p:cNvPr id="2" name="Title 1"/>
-          <p:cNvSpPr>
-            <a:spLocks noGrp="1"/>
-          </p:cNvSpPr>
-          <p:nvPr>
-            <p:ph type="title" idx="100"/>
-          </p:nvPr>
-        </p:nvSpPr>
-        <p:spPr/>
-        <p:txBody>
-          <a:bodyPr/>
-          <a:lstStyle/>
-          <a:p>
-            <a:r>
-              <a:t>5.1 Orca</a:t>
-            </a:r>
-          </a:p>
-        </p:txBody>
-      </p:sp>
-      <p:sp>
-        <p:nvSpPr>
-          <p:cNvPr id="3" name="Text Placeholder 2"/>
-          <p:cNvSpPr>
-            <a:spLocks noGrp="1"/>
-          </p:cNvSpPr>
-          <p:nvPr>
-            <p:ph type="body" idx="101"/>
-          </p:nvPr>
-        </p:nvSpPr>
-        <p:spPr/>
-        <p:txBody>
-          <a:bodyPr/>
-          <a:lstStyle/>
-          <a:p>
-            <a:r>
-              <a:t>5. 여러 에이전트 병렬 실행</a:t>
+          <p:cNvPr id="2" name="Text Placeholder 1"/>
+          <p:cNvSpPr>
+            <a:spLocks noGrp="1"/>
+          </p:cNvSpPr>
+          <p:nvPr>
+            <p:ph type="body" idx="100"/>
+          </p:nvPr>
+        </p:nvSpPr>
+        <p:spPr/>
+        <p:txBody>
+          <a:bodyPr/>
+          <a:lstStyle/>
+          <a:p>
+            <a:r>
+              <a:t>05</a:t>
+            </a:r>
+          </a:p>
+        </p:txBody>
+      </p:sp>
+      <p:sp>
+        <p:nvSpPr>
+          <p:cNvPr id="3" name="Title 2"/>
+          <p:cNvSpPr>
+            <a:spLocks noGrp="1"/>
+          </p:cNvSpPr>
+          <p:nvPr>
+            <p:ph type="title" idx="101"/>
+          </p:nvPr>
+        </p:nvSpPr>
+        <p:spPr/>
+        <p:txBody>
+          <a:bodyPr/>
+          <a:lstStyle/>
+          <a:p>
+            <a:r>
+              <a:t>명령어와 토큰</a:t>
             </a:r>
           </a:p>
         </p:txBody>
@@ -8990,76 +10089,94 @@
           <a:bodyPr/>
           <a:lstStyle/>
           <a:p>
-            <a:pPr/>
-            <a:r>
-              <a:t>형태: 오픈소스 데스크톱 앱 — 에이전트 CLI 여러 개를 한 화면에서 실행</a:t>
-            </a:r>
-          </a:p>
-          <a:p>
-            <a:pPr/>
-            <a:r>
-              <a:t>격리 방식: 깃 worktree 하나에 에이전트 하나</a:t>
-            </a:r>
-          </a:p>
-          <a:p>
-            <a:pPr/>
-            <a:r>
-              <a:t>지원 범위: Claude Code, Codex 등 CLI 30종 이상</a:t>
-            </a:r>
-          </a:p>
-          <a:p>
-            <a:pPr/>
-            <a:r>
-              <a:t>오늘 설치 대상 아님 — 존재와 쓰임만 확인</a:t>
-            </a:r>
-          </a:p>
-        </p:txBody>
-      </p:sp>
-      <p:sp>
-        <p:nvSpPr>
-          <p:cNvPr id="25" name="Slide Number Placeholder 0"/>
-          <p:cNvSpPr>
-            <a:spLocks noGrp="1"/>
-          </p:cNvSpPr>
-          <p:nvPr>
-            <p:ph type="sldNum" sz="quarter" idx="4294967295"/>
-          </p:nvPr>
-        </p:nvSpPr>
-        <p:spPr>
-          <a:xfrm>
-            <a:off x="10591495" y="6355080"/>
-            <a:ext cx="914400" cy="274320"/>
-          </a:xfrm>
-          <a:prstGeom prst="rect">
-            <a:avLst/>
-          </a:prstGeom>
-          <a:extLst>
-            <a:ext uri="{C572A759-6A51-4108-AA02-DFA0A04FC94B}">
-              <ma14:wrappingTextBoxFlag xmlns:ma14="http://schemas.microsoft.com/office/mac/drawingml/2011/main" val="0"/>
-            </a:ext>
-          </a:extLst>
-        </p:spPr>
-        <p:txBody>
-          <a:bodyPr/>
-          <a:lstStyle>
-            <a:lvl1pPr>
-              <a:defRPr sz="1000">
+            <a:pPr>
+              <a:spcAft>
+                <a:spcPts val="1000"/>
+              </a:spcAft>
+            </a:pPr>
+            <a:r>
+              <a:rPr>
                 <a:solidFill>
                   <a:srgbClr val="AFAFAF"/>
                 </a:solidFill>
-                <a:latin typeface="Pretendard Medium"/>
-                <a:ea typeface="Pretendard Medium"/>
-                <a:cs typeface="Pretendard Medium"/>
-              </a:defRPr>
-            </a:lvl1pPr>
-          </a:lstStyle>
-          <a:p>
-            <a:pPr algn="r"/>
-            <a:fld id="{F7021451-1387-4CA6-816F-3879F97B5CBC}" type="slidenum">
-              <a:rPr b="0" lang="en-US"/>
-              <a:t>1004</a:t>
-            </a:fld>
-            <a:endParaRPr lang="en-US"/>
+              </a:rPr>
+              <a:t>5.1  </a:t>
+            </a:r>
+            <a:r>
+              <a:t>자주 쓰는 명령</a:t>
+            </a:r>
+          </a:p>
+          <a:p>
+            <a:pPr>
+              <a:spcAft>
+                <a:spcPts val="1000"/>
+              </a:spcAft>
+            </a:pPr>
+            <a:r>
+              <a:rPr>
+                <a:solidFill>
+                  <a:srgbClr val="AFAFAF"/>
+                </a:solidFill>
+              </a:rPr>
+              <a:t>5.2  </a:t>
+            </a:r>
+            <a:r>
+              <a:t>대화를 비우는 기준</a:t>
+            </a:r>
+          </a:p>
+          <a:p>
+            <a:pPr>
+              <a:spcAft>
+                <a:spcPts val="1000"/>
+              </a:spcAft>
+            </a:pPr>
+            <a:r>
+              <a:rPr>
+                <a:solidFill>
+                  <a:srgbClr val="AFAFAF"/>
+                </a:solidFill>
+              </a:rPr>
+              <a:t>5.3  </a:t>
+            </a:r>
+            <a:r>
+              <a:t>모델 선택</a:t>
+            </a:r>
+          </a:p>
+          <a:p>
+            <a:pPr>
+              <a:spcAft>
+                <a:spcPts val="1000"/>
+              </a:spcAft>
+            </a:pPr>
+            <a:r>
+              <a:rPr>
+                <a:solidFill>
+                  <a:srgbClr val="AFAFAF"/>
+                </a:solidFill>
+              </a:rPr>
+              <a:t>5.4  </a:t>
+            </a:r>
+            <a:r>
+              <a:t>md 파일로 남기는 맥락</a:t>
+            </a:r>
+          </a:p>
+          <a:p>
+            <a:pPr>
+              <a:spcAft>
+                <a:spcPts val="1000"/>
+              </a:spcAft>
+            </a:pPr>
+            <a:r>
+              <a:rPr>
+                <a:solidFill>
+                  <a:srgbClr val="AFAFAF"/>
+                </a:solidFill>
+              </a:rPr>
+              <a:t>5.5  </a:t>
+            </a:r>
+            <a:r>
+              <a:t>토큰을 아끼는 습관</a:t>
+            </a:r>
           </a:p>
         </p:txBody>
       </p:sp>
@@ -9097,7 +10214,7 @@
           <a:lstStyle/>
           <a:p>
             <a:r>
-              <a:t>5.2 병렬 실행이 필요한 시점</a:t>
+              <a:t>5.1 자주 쓰는 명령</a:t>
             </a:r>
           </a:p>
         </p:txBody>
@@ -9118,7 +10235,7 @@
           <a:lstStyle/>
           <a:p>
             <a:r>
-              <a:t>5. 여러 에이전트 병렬 실행</a:t>
+              <a:t>5. 명령어와 토큰</a:t>
             </a:r>
           </a:p>
         </p:txBody>
@@ -9140,29 +10257,615 @@
           <a:p>
             <a:pPr/>
             <a:r>
-              <a:t>지금 단계: 에이전트 하나로 충분</a:t>
+              <a:t>사용량 확인: Claude Code는 /context와 /usage, Codex는 /status</a:t>
             </a:r>
           </a:p>
           <a:p>
             <a:pPr/>
             <a:r>
-              <a:t>필요해지는 시점: 팀 프로젝트에서 사람마다 다른 시나리오를 동시에</a:t>
+              <a:t>되돌리기: Claude Code는 /rewind, 공통으로 git diff와 git restore</a:t>
             </a:r>
           </a:p>
           <a:p>
             <a:pPr/>
             <a:r>
-              <a:t>판단 기준: 기다리는 시간이 확인하는 시간보다 길어질 때</a:t>
-            </a:r>
-          </a:p>
-          <a:p>
-            <a:pPr/>
-            <a:r>
-              <a:t>주의: 병렬로 늘려도 확인은 사람 몫</a:t>
-            </a:r>
-          </a:p>
-        </p:txBody>
-      </p:sp>
+              <a:t>이어서 작업: claude --continue 또는 claude --resume</a:t>
+            </a:r>
+          </a:p>
+        </p:txBody>
+      </p:sp>
+      <p:sp>
+        <p:nvSpPr>
+          <p:cNvPr id="5" name="Text Placeholder 4"/>
+          <p:cNvSpPr>
+            <a:spLocks noGrp="1"/>
+          </p:cNvSpPr>
+          <p:nvPr>
+            <p:ph type="body" idx="103"/>
+          </p:nvPr>
+        </p:nvSpPr>
+        <p:spPr/>
+        <p:txBody>
+          <a:bodyPr/>
+          <a:lstStyle/>
+          <a:p>
+            <a:r>
+              <a:t>표 3. 목적별 명령 대응</a:t>
+            </a:r>
+          </a:p>
+        </p:txBody>
+      </p:sp>
+      <p:graphicFrame>
+        <p:nvGraphicFramePr>
+          <p:cNvPr id="6" name="Table Placeholder 5"/>
+          <p:cNvGraphicFramePr>
+            <a:graphicFrameLocks noGrp="1"/>
+          </p:cNvGraphicFramePr>
+          <p:nvPr>
+            <p:ph type="tbl" idx="104"/>
+          </p:nvPr>
+        </p:nvGraphicFramePr>
+        <p:xfrm>
+          <a:off x="4937760" y="1828800"/>
+          <a:ext cx="6565392" cy="2946400"/>
+        </p:xfrm>
+        <a:graphic>
+          <a:graphicData uri="http://schemas.openxmlformats.org/drawingml/2006/table">
+            <a:tbl>
+              <a:tblPr firstRow="0" bandRow="0" firstCol="0" lastRow="0" lastCol="0" bandCol="0"/>
+              <a:tblGrid>
+                <a:gridCol w="2188464"/>
+                <a:gridCol w="2188464"/>
+                <a:gridCol w="2188464"/>
+              </a:tblGrid>
+              <a:tr h="406400">
+                <a:tc>
+                  <a:txBody>
+                    <a:bodyPr/>
+                    <a:lstStyle/>
+                    <a:p>
+                      <a:r>
+                        <a:rPr sz="1300" b="0">
+                          <a:solidFill>
+                            <a:srgbClr val="FFFFFF"/>
+                          </a:solidFill>
+                          <a:latin typeface="Pretendard Medium"/>
+                        </a:rPr>
+                        <a:t>목적</a:t>
+                      </a:r>
+                    </a:p>
+                  </a:txBody>
+                  <a:tcPr marL="101600" marR="101600" marT="76200" marB="76200" anchor="ctr">
+                    <a:solidFill>
+                      <a:srgbClr val="000000"/>
+                    </a:solidFill>
+                    <a:lnL w="0">
+                      <a:noFill/>
+                    </a:lnL>
+                    <a:lnR w="0">
+                      <a:noFill/>
+                    </a:lnR>
+                    <a:lnT w="0">
+                      <a:noFill/>
+                    </a:lnT>
+                    <a:lnB w="0">
+                      <a:noFill/>
+                    </a:lnB>
+                  </a:tcPr>
+                </a:tc>
+                <a:tc>
+                  <a:txBody>
+                    <a:bodyPr/>
+                    <a:lstStyle/>
+                    <a:p>
+                      <a:r>
+                        <a:rPr sz="1300" b="0">
+                          <a:solidFill>
+                            <a:srgbClr val="FFFFFF"/>
+                          </a:solidFill>
+                          <a:latin typeface="Pretendard Medium"/>
+                        </a:rPr>
+                        <a:t>Claude Code</a:t>
+                      </a:r>
+                    </a:p>
+                  </a:txBody>
+                  <a:tcPr marL="101600" marR="101600" marT="76200" marB="76200" anchor="ctr">
+                    <a:solidFill>
+                      <a:srgbClr val="000000"/>
+                    </a:solidFill>
+                    <a:lnL w="0">
+                      <a:noFill/>
+                    </a:lnL>
+                    <a:lnR w="0">
+                      <a:noFill/>
+                    </a:lnR>
+                    <a:lnT w="0">
+                      <a:noFill/>
+                    </a:lnT>
+                    <a:lnB w="0">
+                      <a:noFill/>
+                    </a:lnB>
+                  </a:tcPr>
+                </a:tc>
+                <a:tc>
+                  <a:txBody>
+                    <a:bodyPr/>
+                    <a:lstStyle/>
+                    <a:p>
+                      <a:r>
+                        <a:rPr sz="1300" b="0">
+                          <a:solidFill>
+                            <a:srgbClr val="FFFFFF"/>
+                          </a:solidFill>
+                          <a:latin typeface="Pretendard Medium"/>
+                        </a:rPr>
+                        <a:t>Codex</a:t>
+                      </a:r>
+                    </a:p>
+                  </a:txBody>
+                  <a:tcPr marL="101600" marR="101600" marT="76200" marB="76200" anchor="ctr">
+                    <a:solidFill>
+                      <a:srgbClr val="000000"/>
+                    </a:solidFill>
+                    <a:lnL w="0">
+                      <a:noFill/>
+                    </a:lnL>
+                    <a:lnR w="0">
+                      <a:noFill/>
+                    </a:lnR>
+                    <a:lnT w="0">
+                      <a:noFill/>
+                    </a:lnT>
+                    <a:lnB w="0">
+                      <a:noFill/>
+                    </a:lnB>
+                  </a:tcPr>
+                </a:tc>
+              </a:tr>
+              <a:tr h="635000">
+                <a:tc>
+                  <a:txBody>
+                    <a:bodyPr/>
+                    <a:lstStyle/>
+                    <a:p>
+                      <a:r>
+                        <a:rPr sz="1300" b="1">
+                          <a:solidFill>
+                            <a:srgbClr val="000000"/>
+                          </a:solidFill>
+                          <a:latin typeface="Pretendard"/>
+                        </a:rPr>
+                        <a:t>모델·추론 강도 변경</a:t>
+                      </a:r>
+                    </a:p>
+                  </a:txBody>
+                  <a:tcPr marL="101600" marR="101600" marT="101600" marB="101600" anchor="ctr">
+                    <a:solidFill>
+                      <a:srgbClr val="FFFFFF"/>
+                    </a:solidFill>
+                    <a:lnL w="0">
+                      <a:noFill/>
+                    </a:lnL>
+                    <a:lnR w="0">
+                      <a:noFill/>
+                    </a:lnR>
+                    <a:lnT w="0">
+                      <a:noFill/>
+                    </a:lnT>
+                    <a:lnB w="9525">
+                      <a:solidFill>
+                        <a:srgbClr val="E2E2E2"/>
+                      </a:solidFill>
+                    </a:lnB>
+                  </a:tcPr>
+                </a:tc>
+                <a:tc>
+                  <a:txBody>
+                    <a:bodyPr/>
+                    <a:lstStyle/>
+                    <a:p>
+                      <a:r>
+                        <a:rPr sz="1300" b="0">
+                          <a:solidFill>
+                            <a:srgbClr val="5E5E5E"/>
+                          </a:solidFill>
+                          <a:latin typeface="Pretendard Medium"/>
+                        </a:rPr>
+                        <a:t>/model</a:t>
+                      </a:r>
+                    </a:p>
+                  </a:txBody>
+                  <a:tcPr marL="101600" marR="101600" marT="101600" marB="101600" anchor="ctr">
+                    <a:solidFill>
+                      <a:srgbClr val="FFFFFF"/>
+                    </a:solidFill>
+                    <a:lnL w="0">
+                      <a:noFill/>
+                    </a:lnL>
+                    <a:lnR w="0">
+                      <a:noFill/>
+                    </a:lnR>
+                    <a:lnT w="0">
+                      <a:noFill/>
+                    </a:lnT>
+                    <a:lnB w="9525">
+                      <a:solidFill>
+                        <a:srgbClr val="E2E2E2"/>
+                      </a:solidFill>
+                    </a:lnB>
+                  </a:tcPr>
+                </a:tc>
+                <a:tc>
+                  <a:txBody>
+                    <a:bodyPr/>
+                    <a:lstStyle/>
+                    <a:p>
+                      <a:r>
+                        <a:rPr sz="1300" b="0">
+                          <a:solidFill>
+                            <a:srgbClr val="5E5E5E"/>
+                          </a:solidFill>
+                          <a:latin typeface="Pretendard Medium"/>
+                        </a:rPr>
+                        <a:t>/model</a:t>
+                      </a:r>
+                    </a:p>
+                  </a:txBody>
+                  <a:tcPr marL="101600" marR="101600" marT="101600" marB="101600" anchor="ctr">
+                    <a:solidFill>
+                      <a:srgbClr val="FFFFFF"/>
+                    </a:solidFill>
+                    <a:lnL w="0">
+                      <a:noFill/>
+                    </a:lnL>
+                    <a:lnR w="0">
+                      <a:noFill/>
+                    </a:lnR>
+                    <a:lnT w="0">
+                      <a:noFill/>
+                    </a:lnT>
+                    <a:lnB w="9525">
+                      <a:solidFill>
+                        <a:srgbClr val="E2E2E2"/>
+                      </a:solidFill>
+                    </a:lnB>
+                  </a:tcPr>
+                </a:tc>
+              </a:tr>
+              <a:tr h="635000">
+                <a:tc>
+                  <a:txBody>
+                    <a:bodyPr/>
+                    <a:lstStyle/>
+                    <a:p>
+                      <a:r>
+                        <a:rPr sz="1300" b="1">
+                          <a:solidFill>
+                            <a:srgbClr val="000000"/>
+                          </a:solidFill>
+                          <a:latin typeface="Pretendard"/>
+                        </a:rPr>
+                        <a:t>대화 비우기</a:t>
+                      </a:r>
+                    </a:p>
+                  </a:txBody>
+                  <a:tcPr marL="101600" marR="101600" marT="101600" marB="101600" anchor="ctr">
+                    <a:solidFill>
+                      <a:srgbClr val="FFFFFF"/>
+                    </a:solidFill>
+                    <a:lnL w="0">
+                      <a:noFill/>
+                    </a:lnL>
+                    <a:lnR w="0">
+                      <a:noFill/>
+                    </a:lnR>
+                    <a:lnT w="0">
+                      <a:noFill/>
+                    </a:lnT>
+                    <a:lnB w="9525">
+                      <a:solidFill>
+                        <a:srgbClr val="E2E2E2"/>
+                      </a:solidFill>
+                    </a:lnB>
+                  </a:tcPr>
+                </a:tc>
+                <a:tc>
+                  <a:txBody>
+                    <a:bodyPr/>
+                    <a:lstStyle/>
+                    <a:p>
+                      <a:r>
+                        <a:rPr sz="1300" b="0">
+                          <a:solidFill>
+                            <a:srgbClr val="5E5E5E"/>
+                          </a:solidFill>
+                          <a:latin typeface="Pretendard Medium"/>
+                        </a:rPr>
+                        <a:t>/clear</a:t>
+                      </a:r>
+                    </a:p>
+                  </a:txBody>
+                  <a:tcPr marL="101600" marR="101600" marT="101600" marB="101600" anchor="ctr">
+                    <a:solidFill>
+                      <a:srgbClr val="FFFFFF"/>
+                    </a:solidFill>
+                    <a:lnL w="0">
+                      <a:noFill/>
+                    </a:lnL>
+                    <a:lnR w="0">
+                      <a:noFill/>
+                    </a:lnR>
+                    <a:lnT w="0">
+                      <a:noFill/>
+                    </a:lnT>
+                    <a:lnB w="9525">
+                      <a:solidFill>
+                        <a:srgbClr val="E2E2E2"/>
+                      </a:solidFill>
+                    </a:lnB>
+                  </a:tcPr>
+                </a:tc>
+                <a:tc>
+                  <a:txBody>
+                    <a:bodyPr/>
+                    <a:lstStyle/>
+                    <a:p>
+                      <a:r>
+                        <a:rPr sz="1300" b="0">
+                          <a:solidFill>
+                            <a:srgbClr val="5E5E5E"/>
+                          </a:solidFill>
+                          <a:latin typeface="Pretendard Medium"/>
+                        </a:rPr>
+                        <a:t>/new</a:t>
+                      </a:r>
+                    </a:p>
+                  </a:txBody>
+                  <a:tcPr marL="101600" marR="101600" marT="101600" marB="101600" anchor="ctr">
+                    <a:solidFill>
+                      <a:srgbClr val="FFFFFF"/>
+                    </a:solidFill>
+                    <a:lnL w="0">
+                      <a:noFill/>
+                    </a:lnL>
+                    <a:lnR w="0">
+                      <a:noFill/>
+                    </a:lnR>
+                    <a:lnT w="0">
+                      <a:noFill/>
+                    </a:lnT>
+                    <a:lnB w="9525">
+                      <a:solidFill>
+                        <a:srgbClr val="E2E2E2"/>
+                      </a:solidFill>
+                    </a:lnB>
+                  </a:tcPr>
+                </a:tc>
+              </a:tr>
+              <a:tr h="635000">
+                <a:tc>
+                  <a:txBody>
+                    <a:bodyPr/>
+                    <a:lstStyle/>
+                    <a:p>
+                      <a:r>
+                        <a:rPr sz="1300" b="1">
+                          <a:solidFill>
+                            <a:srgbClr val="000000"/>
+                          </a:solidFill>
+                          <a:latin typeface="Pretendard"/>
+                        </a:rPr>
+                        <a:t>대화 압축</a:t>
+                      </a:r>
+                    </a:p>
+                  </a:txBody>
+                  <a:tcPr marL="101600" marR="101600" marT="101600" marB="101600" anchor="ctr">
+                    <a:solidFill>
+                      <a:srgbClr val="FFFFFF"/>
+                    </a:solidFill>
+                    <a:lnL w="0">
+                      <a:noFill/>
+                    </a:lnL>
+                    <a:lnR w="0">
+                      <a:noFill/>
+                    </a:lnR>
+                    <a:lnT w="0">
+                      <a:noFill/>
+                    </a:lnT>
+                    <a:lnB w="9525">
+                      <a:solidFill>
+                        <a:srgbClr val="E2E2E2"/>
+                      </a:solidFill>
+                    </a:lnB>
+                  </a:tcPr>
+                </a:tc>
+                <a:tc>
+                  <a:txBody>
+                    <a:bodyPr/>
+                    <a:lstStyle/>
+                    <a:p>
+                      <a:r>
+                        <a:rPr sz="1300" b="0">
+                          <a:solidFill>
+                            <a:srgbClr val="5E5E5E"/>
+                          </a:solidFill>
+                          <a:latin typeface="Pretendard Medium"/>
+                        </a:rPr>
+                        <a:t>/compact</a:t>
+                      </a:r>
+                    </a:p>
+                  </a:txBody>
+                  <a:tcPr marL="101600" marR="101600" marT="101600" marB="101600" anchor="ctr">
+                    <a:solidFill>
+                      <a:srgbClr val="FFFFFF"/>
+                    </a:solidFill>
+                    <a:lnL w="0">
+                      <a:noFill/>
+                    </a:lnL>
+                    <a:lnR w="0">
+                      <a:noFill/>
+                    </a:lnR>
+                    <a:lnT w="0">
+                      <a:noFill/>
+                    </a:lnT>
+                    <a:lnB w="9525">
+                      <a:solidFill>
+                        <a:srgbClr val="E2E2E2"/>
+                      </a:solidFill>
+                    </a:lnB>
+                  </a:tcPr>
+                </a:tc>
+                <a:tc>
+                  <a:txBody>
+                    <a:bodyPr/>
+                    <a:lstStyle/>
+                    <a:p>
+                      <a:r>
+                        <a:rPr sz="1300" b="0">
+                          <a:solidFill>
+                            <a:srgbClr val="5E5E5E"/>
+                          </a:solidFill>
+                          <a:latin typeface="Pretendard Medium"/>
+                        </a:rPr>
+                        <a:t>/compact</a:t>
+                      </a:r>
+                    </a:p>
+                  </a:txBody>
+                  <a:tcPr marL="101600" marR="101600" marT="101600" marB="101600" anchor="ctr">
+                    <a:solidFill>
+                      <a:srgbClr val="FFFFFF"/>
+                    </a:solidFill>
+                    <a:lnL w="0">
+                      <a:noFill/>
+                    </a:lnL>
+                    <a:lnR w="0">
+                      <a:noFill/>
+                    </a:lnR>
+                    <a:lnT w="0">
+                      <a:noFill/>
+                    </a:lnT>
+                    <a:lnB w="9525">
+                      <a:solidFill>
+                        <a:srgbClr val="E2E2E2"/>
+                      </a:solidFill>
+                    </a:lnB>
+                  </a:tcPr>
+                </a:tc>
+              </a:tr>
+              <a:tr h="635000">
+                <a:tc>
+                  <a:txBody>
+                    <a:bodyPr/>
+                    <a:lstStyle/>
+                    <a:p>
+                      <a:r>
+                        <a:rPr sz="1300" b="1">
+                          <a:solidFill>
+                            <a:srgbClr val="000000"/>
+                          </a:solidFill>
+                          <a:latin typeface="Pretendard"/>
+                        </a:rPr>
+                        <a:t>규칙 파일 생성</a:t>
+                      </a:r>
+                    </a:p>
+                  </a:txBody>
+                  <a:tcPr marL="101600" marR="101600" marT="101600" marB="101600" anchor="ctr">
+                    <a:solidFill>
+                      <a:srgbClr val="FFFFFF"/>
+                    </a:solidFill>
+                    <a:lnL w="0">
+                      <a:noFill/>
+                    </a:lnL>
+                    <a:lnR w="0">
+                      <a:noFill/>
+                    </a:lnR>
+                    <a:lnT w="0">
+                      <a:noFill/>
+                    </a:lnT>
+                    <a:lnB w="9525">
+                      <a:solidFill>
+                        <a:srgbClr val="E2E2E2"/>
+                      </a:solidFill>
+                    </a:lnB>
+                  </a:tcPr>
+                </a:tc>
+                <a:tc>
+                  <a:txBody>
+                    <a:bodyPr/>
+                    <a:lstStyle/>
+                    <a:p>
+                      <a:r>
+                        <a:rPr sz="1300" b="0">
+                          <a:solidFill>
+                            <a:srgbClr val="5E5E5E"/>
+                          </a:solidFill>
+                          <a:latin typeface="Pretendard Medium"/>
+                        </a:rPr>
+                        <a:t>/init → CLAUDE.md</a:t>
+                      </a:r>
+                    </a:p>
+                  </a:txBody>
+                  <a:tcPr marL="101600" marR="101600" marT="101600" marB="101600" anchor="ctr">
+                    <a:solidFill>
+                      <a:srgbClr val="FFFFFF"/>
+                    </a:solidFill>
+                    <a:lnL w="0">
+                      <a:noFill/>
+                    </a:lnL>
+                    <a:lnR w="0">
+                      <a:noFill/>
+                    </a:lnR>
+                    <a:lnT w="0">
+                      <a:noFill/>
+                    </a:lnT>
+                    <a:lnB w="9525">
+                      <a:solidFill>
+                        <a:srgbClr val="E2E2E2"/>
+                      </a:solidFill>
+                    </a:lnB>
+                  </a:tcPr>
+                </a:tc>
+                <a:tc>
+                  <a:txBody>
+                    <a:bodyPr/>
+                    <a:lstStyle/>
+                    <a:p>
+                      <a:r>
+                        <a:rPr sz="1300" b="0">
+                          <a:solidFill>
+                            <a:srgbClr val="5E5E5E"/>
+                          </a:solidFill>
+                          <a:latin typeface="Pretendard Medium"/>
+                        </a:rPr>
+                        <a:t>/init → AGENTS.md</a:t>
+                      </a:r>
+                    </a:p>
+                  </a:txBody>
+                  <a:tcPr marL="101600" marR="101600" marT="101600" marB="101600" anchor="ctr">
+                    <a:solidFill>
+                      <a:srgbClr val="FFFFFF"/>
+                    </a:solidFill>
+                    <a:lnL w="0">
+                      <a:noFill/>
+                    </a:lnL>
+                    <a:lnR w="0">
+                      <a:noFill/>
+                    </a:lnR>
+                    <a:lnT w="0">
+                      <a:noFill/>
+                    </a:lnT>
+                    <a:lnB w="9525">
+                      <a:solidFill>
+                        <a:srgbClr val="E2E2E2"/>
+                      </a:solidFill>
+                    </a:lnB>
+                  </a:tcPr>
+                </a:tc>
+              </a:tr>
+            </a:tbl>
+          </a:graphicData>
+        </a:graphic>
+      </p:graphicFrame>
       <p:sp>
         <p:nvSpPr>
           <p:cNvPr id="25" name="Slide Number Placeholder 0"/>
@@ -9205,7 +10908,7 @@
             <a:pPr algn="r"/>
             <a:fld id="{F7021451-1387-4CA6-816F-3879F97B5CBC}" type="slidenum">
               <a:rPr b="0" lang="en-US"/>
-              <a:t>1004</a:t>
+              <a:t>1008</a:t>
             </a:fld>
             <a:endParaRPr lang="en-US"/>
           </a:p>
@@ -9231,42 +10934,42 @@
       <p:grpSpPr/>
       <p:sp>
         <p:nvSpPr>
-          <p:cNvPr id="2" name="Text Placeholder 1"/>
-          <p:cNvSpPr>
-            <a:spLocks noGrp="1"/>
-          </p:cNvSpPr>
-          <p:nvPr>
-            <p:ph type="body" idx="100"/>
-          </p:nvPr>
-        </p:nvSpPr>
-        <p:spPr/>
-        <p:txBody>
-          <a:bodyPr/>
-          <a:lstStyle/>
-          <a:p>
-            <a:r>
-              <a:t>06</a:t>
-            </a:r>
-          </a:p>
-        </p:txBody>
-      </p:sp>
-      <p:sp>
-        <p:nvSpPr>
-          <p:cNvPr id="3" name="Title 2"/>
-          <p:cNvSpPr>
-            <a:spLocks noGrp="1"/>
-          </p:cNvSpPr>
-          <p:nvPr>
-            <p:ph type="title" idx="101"/>
-          </p:nvPr>
-        </p:nvSpPr>
-        <p:spPr/>
-        <p:txBody>
-          <a:bodyPr/>
-          <a:lstStyle/>
-          <a:p>
-            <a:r>
-              <a:t>정리</a:t>
+          <p:cNvPr id="2" name="Title 1"/>
+          <p:cNvSpPr>
+            <a:spLocks noGrp="1"/>
+          </p:cNvSpPr>
+          <p:nvPr>
+            <p:ph type="title" idx="100"/>
+          </p:nvPr>
+        </p:nvSpPr>
+        <p:spPr/>
+        <p:txBody>
+          <a:bodyPr/>
+          <a:lstStyle/>
+          <a:p>
+            <a:r>
+              <a:t>5.2 대화를 비우는 기준</a:t>
+            </a:r>
+          </a:p>
+        </p:txBody>
+      </p:sp>
+      <p:sp>
+        <p:nvSpPr>
+          <p:cNvPr id="3" name="Text Placeholder 2"/>
+          <p:cNvSpPr>
+            <a:spLocks noGrp="1"/>
+          </p:cNvSpPr>
+          <p:nvPr>
+            <p:ph type="body" idx="101"/>
+          </p:nvPr>
+        </p:nvSpPr>
+        <p:spPr/>
+        <p:txBody>
+          <a:bodyPr/>
+          <a:lstStyle/>
+          <a:p>
+            <a:r>
+              <a:t>5. 명령어와 토큰</a:t>
             </a:r>
           </a:p>
         </p:txBody>
@@ -9286,58 +10989,76 @@
           <a:bodyPr/>
           <a:lstStyle/>
           <a:p>
-            <a:pPr>
-              <a:spcAft>
-                <a:spcPts val="1000"/>
-              </a:spcAft>
-            </a:pPr>
-            <a:r>
-              <a:rPr>
+            <a:pPr/>
+            <a:r>
+              <a:t>대화는 매 요청마다 통째로 다시 전송 — 길수록 느리고 비쌈</a:t>
+            </a:r>
+          </a:p>
+          <a:p>
+            <a:pPr/>
+            <a:r>
+              <a:t>작업이 바뀌면 /clear — 과제 A에서 과제 B로 넘어갈 때</a:t>
+            </a:r>
+          </a:p>
+          <a:p>
+            <a:pPr/>
+            <a:r>
+              <a:t>같은 작업이 길어지면 /compact — 요약만 남기고 이어 진행</a:t>
+            </a:r>
+          </a:p>
+          <a:p>
+            <a:pPr/>
+            <a:r>
+              <a:t>확인 방법: /context로 무엇이 얼마나 차 있는지 확인</a:t>
+            </a:r>
+          </a:p>
+        </p:txBody>
+      </p:sp>
+      <p:sp>
+        <p:nvSpPr>
+          <p:cNvPr id="25" name="Slide Number Placeholder 0"/>
+          <p:cNvSpPr>
+            <a:spLocks noGrp="1"/>
+          </p:cNvSpPr>
+          <p:nvPr>
+            <p:ph type="sldNum" sz="quarter" idx="4294967295"/>
+          </p:nvPr>
+        </p:nvSpPr>
+        <p:spPr>
+          <a:xfrm>
+            <a:off x="10591495" y="6355080"/>
+            <a:ext cx="914400" cy="274320"/>
+          </a:xfrm>
+          <a:prstGeom prst="rect">
+            <a:avLst/>
+          </a:prstGeom>
+          <a:extLst>
+            <a:ext uri="{C572A759-6A51-4108-AA02-DFA0A04FC94B}">
+              <ma14:wrappingTextBoxFlag xmlns:ma14="http://schemas.microsoft.com/office/mac/drawingml/2011/main" val="0"/>
+            </a:ext>
+          </a:extLst>
+        </p:spPr>
+        <p:txBody>
+          <a:bodyPr/>
+          <a:lstStyle>
+            <a:lvl1pPr>
+              <a:defRPr sz="1000">
                 <a:solidFill>
                   <a:srgbClr val="AFAFAF"/>
                 </a:solidFill>
-              </a:rPr>
-              <a:t>6.1  </a:t>
-            </a:r>
-            <a:r>
-              <a:t>설치 확인 목록</a:t>
-            </a:r>
-          </a:p>
-          <a:p>
-            <a:pPr>
-              <a:spcAft>
-                <a:spcPts val="1000"/>
-              </a:spcAft>
-            </a:pPr>
-            <a:r>
-              <a:rPr>
-                <a:solidFill>
-                  <a:srgbClr val="AFAFAF"/>
-                </a:solidFill>
-              </a:rPr>
-              <a:t>6.2  </a:t>
-            </a:r>
-            <a:r>
-              <a:t>오늘의 정리</a:t>
-            </a:r>
-          </a:p>
-          <a:p>
-            <a:pPr>
-              <a:spcAft>
-                <a:spcPts val="1000"/>
-              </a:spcAft>
-            </a:pPr>
-            <a:r>
-              <a:rPr>
-                <a:solidFill>
-                  <a:srgbClr val="AFAFAF"/>
-                </a:solidFill>
-              </a:rPr>
-              <a:t>6.3  </a:t>
-            </a:r>
-            <a:r>
-              <a:t>다음 시간</a:t>
-            </a:r>
+                <a:latin typeface="Pretendard Medium"/>
+                <a:ea typeface="Pretendard Medium"/>
+                <a:cs typeface="Pretendard Medium"/>
+              </a:defRPr>
+            </a:lvl1pPr>
+          </a:lstStyle>
+          <a:p>
+            <a:pPr algn="r"/>
+            <a:fld id="{F7021451-1387-4CA6-816F-3879F97B5CBC}" type="slidenum">
+              <a:rPr b="0" lang="en-US"/>
+              <a:t>1004</a:t>
+            </a:fld>
+            <a:endParaRPr lang="en-US"/>
           </a:p>
         </p:txBody>
       </p:sp>
@@ -9375,7 +11096,7 @@
           <a:lstStyle/>
           <a:p>
             <a:r>
-              <a:t>6.1 설치 확인 목록</a:t>
+              <a:t>5.3 모델 선택</a:t>
             </a:r>
           </a:p>
         </p:txBody>
@@ -9396,7 +11117,7 @@
           <a:lstStyle/>
           <a:p>
             <a:r>
-              <a:t>6. 정리</a:t>
+              <a:t>5. 명령어와 토큰</a:t>
             </a:r>
           </a:p>
         </p:txBody>
@@ -9418,6 +11139,1024 @@
           <a:p>
             <a:pPr/>
             <a:r>
+              <a:t>작업 난이도에 따라 /model로 변경</a:t>
+            </a:r>
+          </a:p>
+          <a:p>
+            <a:pPr/>
+            <a:r>
+              <a:t>가벼운 작업: 파일 정리, 형식 변환, 오류 메시지 해석</a:t>
+            </a:r>
+          </a:p>
+          <a:p>
+            <a:pPr/>
+            <a:r>
+              <a:t>무거운 작업: 설계 결정, 알고리즘 구현, 원인이 불분명한 오류</a:t>
+            </a:r>
+          </a:p>
+          <a:p>
+            <a:pPr/>
+            <a:r>
+              <a:t>판단 기준: 답이 틀렸을 때 알아챌 수 있는지 여부</a:t>
+            </a:r>
+          </a:p>
+        </p:txBody>
+      </p:sp>
+      <p:sp>
+        <p:nvSpPr>
+          <p:cNvPr id="25" name="Slide Number Placeholder 0"/>
+          <p:cNvSpPr>
+            <a:spLocks noGrp="1"/>
+          </p:cNvSpPr>
+          <p:nvPr>
+            <p:ph type="sldNum" sz="quarter" idx="4294967295"/>
+          </p:nvPr>
+        </p:nvSpPr>
+        <p:spPr>
+          <a:xfrm>
+            <a:off x="10591495" y="6355080"/>
+            <a:ext cx="914400" cy="274320"/>
+          </a:xfrm>
+          <a:prstGeom prst="rect">
+            <a:avLst/>
+          </a:prstGeom>
+          <a:extLst>
+            <a:ext uri="{C572A759-6A51-4108-AA02-DFA0A04FC94B}">
+              <ma14:wrappingTextBoxFlag xmlns:ma14="http://schemas.microsoft.com/office/mac/drawingml/2011/main" val="0"/>
+            </a:ext>
+          </a:extLst>
+        </p:spPr>
+        <p:txBody>
+          <a:bodyPr/>
+          <a:lstStyle>
+            <a:lvl1pPr>
+              <a:defRPr sz="1000">
+                <a:solidFill>
+                  <a:srgbClr val="AFAFAF"/>
+                </a:solidFill>
+                <a:latin typeface="Pretendard Medium"/>
+                <a:ea typeface="Pretendard Medium"/>
+                <a:cs typeface="Pretendard Medium"/>
+              </a:defRPr>
+            </a:lvl1pPr>
+          </a:lstStyle>
+          <a:p>
+            <a:pPr algn="r"/>
+            <a:fld id="{F7021451-1387-4CA6-816F-3879F97B5CBC}" type="slidenum">
+              <a:rPr b="0" lang="en-US"/>
+              <a:t>1004</a:t>
+            </a:fld>
+            <a:endParaRPr lang="en-US"/>
+          </a:p>
+        </p:txBody>
+      </p:sp>
+    </p:spTree>
+  </p:cSld>
+  <p:clrMapOvr>
+    <a:masterClrMapping/>
+  </p:clrMapOvr>
+</p:sld>
+</file>
+
+<file path=ppt/slides/slide27.xml><?xml version="1.0" encoding="utf-8"?>
+<p:sld xmlns:a="http://schemas.openxmlformats.org/drawingml/2006/main" xmlns:p="http://schemas.openxmlformats.org/presentationml/2006/main" xmlns:r="http://schemas.openxmlformats.org/officeDocument/2006/relationships">
+  <p:cSld>
+    <p:spTree>
+      <p:nvGrpSpPr>
+        <p:cNvPr id="1" name=""/>
+        <p:cNvGrpSpPr/>
+        <p:nvPr/>
+      </p:nvGrpSpPr>
+      <p:grpSpPr/>
+      <p:sp>
+        <p:nvSpPr>
+          <p:cNvPr id="2" name="Title 1"/>
+          <p:cNvSpPr>
+            <a:spLocks noGrp="1"/>
+          </p:cNvSpPr>
+          <p:nvPr>
+            <p:ph type="title" idx="100"/>
+          </p:nvPr>
+        </p:nvSpPr>
+        <p:spPr/>
+        <p:txBody>
+          <a:bodyPr/>
+          <a:lstStyle/>
+          <a:p>
+            <a:r>
+              <a:t>5.4 md 파일로 남기는 맥락</a:t>
+            </a:r>
+          </a:p>
+        </p:txBody>
+      </p:sp>
+      <p:sp>
+        <p:nvSpPr>
+          <p:cNvPr id="3" name="Text Placeholder 2"/>
+          <p:cNvSpPr>
+            <a:spLocks noGrp="1"/>
+          </p:cNvSpPr>
+          <p:nvPr>
+            <p:ph type="body" idx="101"/>
+          </p:nvPr>
+        </p:nvSpPr>
+        <p:spPr/>
+        <p:txBody>
+          <a:bodyPr/>
+          <a:lstStyle/>
+          <a:p>
+            <a:r>
+              <a:t>5. 명령어와 토큰</a:t>
+            </a:r>
+          </a:p>
+        </p:txBody>
+      </p:sp>
+      <p:sp>
+        <p:nvSpPr>
+          <p:cNvPr id="4" name="Text Placeholder 3"/>
+          <p:cNvSpPr>
+            <a:spLocks noGrp="1"/>
+          </p:cNvSpPr>
+          <p:nvPr>
+            <p:ph type="body" idx="102"/>
+          </p:nvPr>
+        </p:nvSpPr>
+        <p:spPr/>
+        <p:txBody>
+          <a:bodyPr/>
+          <a:lstStyle/>
+          <a:p>
+            <a:pPr/>
+            <a:r>
+              <a:t>대화는 사라지고 파일은 남음 — 결정과 절차는 md로 기록</a:t>
+            </a:r>
+          </a:p>
+          <a:p>
+            <a:pPr/>
+            <a:r>
+              <a:t>프로젝트 규칙: CLAUDE.md 또는 AGENTS.md, /init으로 생성</a:t>
+            </a:r>
+          </a:p>
+          <a:p>
+            <a:pPr/>
+            <a:r>
+              <a:t>작업 기록: notes 폴더에 주제별 md 한 장씩</a:t>
+            </a:r>
+          </a:p>
+          <a:p>
+            <a:pPr/>
+            <a:r>
+              <a:t>다음 세션: 대화를 이어 가는 대신 그 파일만 읽히기</a:t>
+            </a:r>
+          </a:p>
+        </p:txBody>
+      </p:sp>
+      <p:sp>
+        <p:nvSpPr>
+          <p:cNvPr id="25" name="Slide Number Placeholder 0"/>
+          <p:cNvSpPr>
+            <a:spLocks noGrp="1"/>
+          </p:cNvSpPr>
+          <p:nvPr>
+            <p:ph type="sldNum" sz="quarter" idx="4294967295"/>
+          </p:nvPr>
+        </p:nvSpPr>
+        <p:spPr>
+          <a:xfrm>
+            <a:off x="10591495" y="6355080"/>
+            <a:ext cx="914400" cy="274320"/>
+          </a:xfrm>
+          <a:prstGeom prst="rect">
+            <a:avLst/>
+          </a:prstGeom>
+          <a:extLst>
+            <a:ext uri="{C572A759-6A51-4108-AA02-DFA0A04FC94B}">
+              <ma14:wrappingTextBoxFlag xmlns:ma14="http://schemas.microsoft.com/office/mac/drawingml/2011/main" val="0"/>
+            </a:ext>
+          </a:extLst>
+        </p:spPr>
+        <p:txBody>
+          <a:bodyPr/>
+          <a:lstStyle>
+            <a:lvl1pPr>
+              <a:defRPr sz="1000">
+                <a:solidFill>
+                  <a:srgbClr val="AFAFAF"/>
+                </a:solidFill>
+                <a:latin typeface="Pretendard Medium"/>
+                <a:ea typeface="Pretendard Medium"/>
+                <a:cs typeface="Pretendard Medium"/>
+              </a:defRPr>
+            </a:lvl1pPr>
+          </a:lstStyle>
+          <a:p>
+            <a:pPr algn="r"/>
+            <a:fld id="{F7021451-1387-4CA6-816F-3879F97B5CBC}" type="slidenum">
+              <a:rPr b="0" lang="en-US"/>
+              <a:t>1004</a:t>
+            </a:fld>
+            <a:endParaRPr lang="en-US"/>
+          </a:p>
+        </p:txBody>
+      </p:sp>
+    </p:spTree>
+  </p:cSld>
+  <p:clrMapOvr>
+    <a:masterClrMapping/>
+  </p:clrMapOvr>
+</p:sld>
+</file>
+
+<file path=ppt/slides/slide28.xml><?xml version="1.0" encoding="utf-8"?>
+<p:sld xmlns:a="http://schemas.openxmlformats.org/drawingml/2006/main" xmlns:p="http://schemas.openxmlformats.org/presentationml/2006/main" xmlns:r="http://schemas.openxmlformats.org/officeDocument/2006/relationships">
+  <p:cSld>
+    <p:spTree>
+      <p:nvGrpSpPr>
+        <p:cNvPr id="1" name=""/>
+        <p:cNvGrpSpPr/>
+        <p:nvPr/>
+      </p:nvGrpSpPr>
+      <p:grpSpPr/>
+      <p:sp>
+        <p:nvSpPr>
+          <p:cNvPr id="2" name="Title 1"/>
+          <p:cNvSpPr>
+            <a:spLocks noGrp="1"/>
+          </p:cNvSpPr>
+          <p:nvPr>
+            <p:ph type="title" idx="100"/>
+          </p:nvPr>
+        </p:nvSpPr>
+        <p:spPr/>
+        <p:txBody>
+          <a:bodyPr/>
+          <a:lstStyle/>
+          <a:p>
+            <a:r>
+              <a:t>5.5 토큰을 아끼는 습관</a:t>
+            </a:r>
+          </a:p>
+        </p:txBody>
+      </p:sp>
+      <p:sp>
+        <p:nvSpPr>
+          <p:cNvPr id="3" name="Text Placeholder 2"/>
+          <p:cNvSpPr>
+            <a:spLocks noGrp="1"/>
+          </p:cNvSpPr>
+          <p:nvPr>
+            <p:ph type="body" idx="101"/>
+          </p:nvPr>
+        </p:nvSpPr>
+        <p:spPr/>
+        <p:txBody>
+          <a:bodyPr/>
+          <a:lstStyle/>
+          <a:p>
+            <a:r>
+              <a:t>5. 명령어와 토큰</a:t>
+            </a:r>
+          </a:p>
+        </p:txBody>
+      </p:sp>
+      <p:sp>
+        <p:nvSpPr>
+          <p:cNvPr id="4" name="Text Placeholder 3"/>
+          <p:cNvSpPr>
+            <a:spLocks noGrp="1"/>
+          </p:cNvSpPr>
+          <p:nvPr>
+            <p:ph type="body" idx="102"/>
+          </p:nvPr>
+        </p:nvSpPr>
+        <p:spPr/>
+        <p:txBody>
+          <a:bodyPr/>
+          <a:lstStyle/>
+          <a:p>
+            <a:pPr/>
+            <a:r>
+              <a:t>범위 좁히기: 폴더 전체 대신 파일과 함수 지정</a:t>
+            </a:r>
+          </a:p>
+          <a:p>
+            <a:pPr/>
+            <a:r>
+              <a:t>계획 먼저: plan 모드로 합의한 뒤 실행 — 잘못 고친 뒤의 복구 비용이 가장 큼</a:t>
+            </a:r>
+          </a:p>
+          <a:p>
+            <a:pPr/>
+            <a:r>
+              <a:t>반복 지시는 규칙 파일로 이동 — 매번 다시 설명하지 않기</a:t>
+            </a:r>
+          </a:p>
+          <a:p>
+            <a:pPr/>
+            <a:r>
+              <a:t>작업 끝나면 결과를 md로 요약하고 /clear</a:t>
+            </a:r>
+          </a:p>
+        </p:txBody>
+      </p:sp>
+      <p:sp>
+        <p:nvSpPr>
+          <p:cNvPr id="25" name="Slide Number Placeholder 0"/>
+          <p:cNvSpPr>
+            <a:spLocks noGrp="1"/>
+          </p:cNvSpPr>
+          <p:nvPr>
+            <p:ph type="sldNum" sz="quarter" idx="4294967295"/>
+          </p:nvPr>
+        </p:nvSpPr>
+        <p:spPr>
+          <a:xfrm>
+            <a:off x="10591495" y="6355080"/>
+            <a:ext cx="914400" cy="274320"/>
+          </a:xfrm>
+          <a:prstGeom prst="rect">
+            <a:avLst/>
+          </a:prstGeom>
+          <a:extLst>
+            <a:ext uri="{C572A759-6A51-4108-AA02-DFA0A04FC94B}">
+              <ma14:wrappingTextBoxFlag xmlns:ma14="http://schemas.microsoft.com/office/mac/drawingml/2011/main" val="0"/>
+            </a:ext>
+          </a:extLst>
+        </p:spPr>
+        <p:txBody>
+          <a:bodyPr/>
+          <a:lstStyle>
+            <a:lvl1pPr>
+              <a:defRPr sz="1000">
+                <a:solidFill>
+                  <a:srgbClr val="AFAFAF"/>
+                </a:solidFill>
+                <a:latin typeface="Pretendard Medium"/>
+                <a:ea typeface="Pretendard Medium"/>
+                <a:cs typeface="Pretendard Medium"/>
+              </a:defRPr>
+            </a:lvl1pPr>
+          </a:lstStyle>
+          <a:p>
+            <a:pPr algn="r"/>
+            <a:fld id="{F7021451-1387-4CA6-816F-3879F97B5CBC}" type="slidenum">
+              <a:rPr b="0" lang="en-US"/>
+              <a:t>1004</a:t>
+            </a:fld>
+            <a:endParaRPr lang="en-US"/>
+          </a:p>
+        </p:txBody>
+      </p:sp>
+    </p:spTree>
+  </p:cSld>
+  <p:clrMapOvr>
+    <a:masterClrMapping/>
+  </p:clrMapOvr>
+</p:sld>
+</file>
+
+<file path=ppt/slides/slide29.xml><?xml version="1.0" encoding="utf-8"?>
+<p:sld xmlns:a="http://schemas.openxmlformats.org/drawingml/2006/main" xmlns:p="http://schemas.openxmlformats.org/presentationml/2006/main" xmlns:r="http://schemas.openxmlformats.org/officeDocument/2006/relationships">
+  <p:cSld>
+    <p:spTree>
+      <p:nvGrpSpPr>
+        <p:cNvPr id="1" name=""/>
+        <p:cNvGrpSpPr/>
+        <p:nvPr/>
+      </p:nvGrpSpPr>
+      <p:grpSpPr/>
+      <p:sp>
+        <p:nvSpPr>
+          <p:cNvPr id="2" name="Text Placeholder 1"/>
+          <p:cNvSpPr>
+            <a:spLocks noGrp="1"/>
+          </p:cNvSpPr>
+          <p:nvPr>
+            <p:ph type="body" idx="100"/>
+          </p:nvPr>
+        </p:nvSpPr>
+        <p:spPr/>
+        <p:txBody>
+          <a:bodyPr/>
+          <a:lstStyle/>
+          <a:p>
+            <a:r>
+              <a:t>06</a:t>
+            </a:r>
+          </a:p>
+        </p:txBody>
+      </p:sp>
+      <p:sp>
+        <p:nvSpPr>
+          <p:cNvPr id="3" name="Title 2"/>
+          <p:cNvSpPr>
+            <a:spLocks noGrp="1"/>
+          </p:cNvSpPr>
+          <p:nvPr>
+            <p:ph type="title" idx="101"/>
+          </p:nvPr>
+        </p:nvSpPr>
+        <p:spPr/>
+        <p:txBody>
+          <a:bodyPr/>
+          <a:lstStyle/>
+          <a:p>
+            <a:r>
+              <a:t>병렬 실행과 정리</a:t>
+            </a:r>
+          </a:p>
+        </p:txBody>
+      </p:sp>
+      <p:sp>
+        <p:nvSpPr>
+          <p:cNvPr id="4" name="Text Placeholder 3"/>
+          <p:cNvSpPr>
+            <a:spLocks noGrp="1"/>
+          </p:cNvSpPr>
+          <p:nvPr>
+            <p:ph type="body" idx="102"/>
+          </p:nvPr>
+        </p:nvSpPr>
+        <p:spPr/>
+        <p:txBody>
+          <a:bodyPr/>
+          <a:lstStyle/>
+          <a:p>
+            <a:pPr>
+              <a:spcAft>
+                <a:spcPts val="1000"/>
+              </a:spcAft>
+            </a:pPr>
+            <a:r>
+              <a:rPr>
+                <a:solidFill>
+                  <a:srgbClr val="AFAFAF"/>
+                </a:solidFill>
+              </a:rPr>
+              <a:t>6.1  </a:t>
+            </a:r>
+            <a:r>
+              <a:t>Orca</a:t>
+            </a:r>
+          </a:p>
+          <a:p>
+            <a:pPr>
+              <a:spcAft>
+                <a:spcPts val="1000"/>
+              </a:spcAft>
+            </a:pPr>
+            <a:r>
+              <a:rPr>
+                <a:solidFill>
+                  <a:srgbClr val="AFAFAF"/>
+                </a:solidFill>
+              </a:rPr>
+              <a:t>6.2  </a:t>
+            </a:r>
+            <a:r>
+              <a:t>병렬 실행이 필요한 시점</a:t>
+            </a:r>
+          </a:p>
+          <a:p>
+            <a:pPr>
+              <a:spcAft>
+                <a:spcPts val="1000"/>
+              </a:spcAft>
+            </a:pPr>
+            <a:r>
+              <a:rPr>
+                <a:solidFill>
+                  <a:srgbClr val="AFAFAF"/>
+                </a:solidFill>
+              </a:rPr>
+              <a:t>6.3  </a:t>
+            </a:r>
+            <a:r>
+              <a:t>설치 확인 목록</a:t>
+            </a:r>
+          </a:p>
+          <a:p>
+            <a:pPr>
+              <a:spcAft>
+                <a:spcPts val="1000"/>
+              </a:spcAft>
+            </a:pPr>
+            <a:r>
+              <a:rPr>
+                <a:solidFill>
+                  <a:srgbClr val="AFAFAF"/>
+                </a:solidFill>
+              </a:rPr>
+              <a:t>6.4  </a:t>
+            </a:r>
+            <a:r>
+              <a:t>오늘의 정리</a:t>
+            </a:r>
+          </a:p>
+          <a:p>
+            <a:pPr>
+              <a:spcAft>
+                <a:spcPts val="1000"/>
+              </a:spcAft>
+            </a:pPr>
+            <a:r>
+              <a:rPr>
+                <a:solidFill>
+                  <a:srgbClr val="AFAFAF"/>
+                </a:solidFill>
+              </a:rPr>
+              <a:t>6.5  </a:t>
+            </a:r>
+            <a:r>
+              <a:t>다음 시간</a:t>
+            </a:r>
+          </a:p>
+        </p:txBody>
+      </p:sp>
+    </p:spTree>
+  </p:cSld>
+  <p:clrMapOvr>
+    <a:masterClrMapping/>
+  </p:clrMapOvr>
+</p:sld>
+</file>
+
+<file path=ppt/slides/slide3.xml><?xml version="1.0" encoding="utf-8"?>
+<p:sld xmlns:a="http://schemas.openxmlformats.org/drawingml/2006/main" xmlns:p="http://schemas.openxmlformats.org/presentationml/2006/main" xmlns:r="http://schemas.openxmlformats.org/officeDocument/2006/relationships">
+  <p:cSld>
+    <p:spTree>
+      <p:nvGrpSpPr>
+        <p:cNvPr id="1" name=""/>
+        <p:cNvGrpSpPr/>
+        <p:nvPr/>
+      </p:nvGrpSpPr>
+      <p:grpSpPr/>
+      <p:sp>
+        <p:nvSpPr>
+          <p:cNvPr id="2" name="Text Placeholder 1"/>
+          <p:cNvSpPr>
+            <a:spLocks noGrp="1"/>
+          </p:cNvSpPr>
+          <p:nvPr>
+            <p:ph type="body" idx="100"/>
+          </p:nvPr>
+        </p:nvSpPr>
+        <p:spPr/>
+        <p:txBody>
+          <a:bodyPr/>
+          <a:lstStyle/>
+          <a:p>
+            <a:r>
+              <a:t>01</a:t>
+            </a:r>
+          </a:p>
+        </p:txBody>
+      </p:sp>
+      <p:sp>
+        <p:nvSpPr>
+          <p:cNvPr id="3" name="Title 2"/>
+          <p:cNvSpPr>
+            <a:spLocks noGrp="1"/>
+          </p:cNvSpPr>
+          <p:nvPr>
+            <p:ph type="title" idx="101"/>
+          </p:nvPr>
+        </p:nvSpPr>
+        <p:spPr/>
+        <p:txBody>
+          <a:bodyPr/>
+          <a:lstStyle/>
+          <a:p>
+            <a:r>
+              <a:t>오늘 준비하는 것</a:t>
+            </a:r>
+          </a:p>
+        </p:txBody>
+      </p:sp>
+      <p:sp>
+        <p:nvSpPr>
+          <p:cNvPr id="4" name="Text Placeholder 3"/>
+          <p:cNvSpPr>
+            <a:spLocks noGrp="1"/>
+          </p:cNvSpPr>
+          <p:nvPr>
+            <p:ph type="body" idx="102"/>
+          </p:nvPr>
+        </p:nvSpPr>
+        <p:spPr/>
+        <p:txBody>
+          <a:bodyPr/>
+          <a:lstStyle/>
+          <a:p>
+            <a:pPr>
+              <a:spcAft>
+                <a:spcPts val="1000"/>
+              </a:spcAft>
+            </a:pPr>
+            <a:r>
+              <a:rPr>
+                <a:solidFill>
+                  <a:srgbClr val="AFAFAF"/>
+                </a:solidFill>
+              </a:rPr>
+              <a:t>1.1  </a:t>
+            </a:r>
+            <a:r>
+              <a:t>오늘 만드는 작업 환경</a:t>
+            </a:r>
+          </a:p>
+          <a:p>
+            <a:pPr>
+              <a:spcAft>
+                <a:spcPts val="1000"/>
+              </a:spcAft>
+            </a:pPr>
+            <a:r>
+              <a:rPr>
+                <a:solidFill>
+                  <a:srgbClr val="AFAFAF"/>
+                </a:solidFill>
+              </a:rPr>
+              <a:t>1.2  </a:t>
+            </a:r>
+            <a:r>
+              <a:t>학습 목표</a:t>
+            </a:r>
+          </a:p>
+        </p:txBody>
+      </p:sp>
+    </p:spTree>
+  </p:cSld>
+  <p:clrMapOvr>
+    <a:masterClrMapping/>
+  </p:clrMapOvr>
+</p:sld>
+</file>
+
+<file path=ppt/slides/slide30.xml><?xml version="1.0" encoding="utf-8"?>
+<p:sld xmlns:a="http://schemas.openxmlformats.org/drawingml/2006/main" xmlns:p="http://schemas.openxmlformats.org/presentationml/2006/main" xmlns:r="http://schemas.openxmlformats.org/officeDocument/2006/relationships">
+  <p:cSld>
+    <p:spTree>
+      <p:nvGrpSpPr>
+        <p:cNvPr id="1" name=""/>
+        <p:cNvGrpSpPr/>
+        <p:nvPr/>
+      </p:nvGrpSpPr>
+      <p:grpSpPr/>
+      <p:sp>
+        <p:nvSpPr>
+          <p:cNvPr id="2" name="Title 1"/>
+          <p:cNvSpPr>
+            <a:spLocks noGrp="1"/>
+          </p:cNvSpPr>
+          <p:nvPr>
+            <p:ph type="title" idx="100"/>
+          </p:nvPr>
+        </p:nvSpPr>
+        <p:spPr/>
+        <p:txBody>
+          <a:bodyPr/>
+          <a:lstStyle/>
+          <a:p>
+            <a:r>
+              <a:t>6.1 Orca</a:t>
+            </a:r>
+          </a:p>
+        </p:txBody>
+      </p:sp>
+      <p:sp>
+        <p:nvSpPr>
+          <p:cNvPr id="3" name="Text Placeholder 2"/>
+          <p:cNvSpPr>
+            <a:spLocks noGrp="1"/>
+          </p:cNvSpPr>
+          <p:nvPr>
+            <p:ph type="body" idx="101"/>
+          </p:nvPr>
+        </p:nvSpPr>
+        <p:spPr/>
+        <p:txBody>
+          <a:bodyPr/>
+          <a:lstStyle/>
+          <a:p>
+            <a:r>
+              <a:t>6. 병렬 실행과 정리</a:t>
+            </a:r>
+          </a:p>
+        </p:txBody>
+      </p:sp>
+      <p:sp>
+        <p:nvSpPr>
+          <p:cNvPr id="4" name="Text Placeholder 3"/>
+          <p:cNvSpPr>
+            <a:spLocks noGrp="1"/>
+          </p:cNvSpPr>
+          <p:nvPr>
+            <p:ph type="body" idx="102"/>
+          </p:nvPr>
+        </p:nvSpPr>
+        <p:spPr/>
+        <p:txBody>
+          <a:bodyPr/>
+          <a:lstStyle/>
+          <a:p>
+            <a:pPr/>
+            <a:r>
+              <a:t>형태: 오픈소스 데스크톱 앱 — 에이전트 CLI 여러 개를 한 화면에서 실행</a:t>
+            </a:r>
+          </a:p>
+          <a:p>
+            <a:pPr/>
+            <a:r>
+              <a:t>격리 방식: 깃 worktree 하나에 에이전트 하나</a:t>
+            </a:r>
+          </a:p>
+          <a:p>
+            <a:pPr/>
+            <a:r>
+              <a:t>지원 범위: Claude Code, Codex 등 CLI 30종 이상</a:t>
+            </a:r>
+          </a:p>
+          <a:p>
+            <a:pPr/>
+            <a:r>
+              <a:t>오늘 설치 대상 아님 — 존재와 쓰임만 확인</a:t>
+            </a:r>
+          </a:p>
+        </p:txBody>
+      </p:sp>
+      <p:sp>
+        <p:nvSpPr>
+          <p:cNvPr id="25" name="Slide Number Placeholder 0"/>
+          <p:cNvSpPr>
+            <a:spLocks noGrp="1"/>
+          </p:cNvSpPr>
+          <p:nvPr>
+            <p:ph type="sldNum" sz="quarter" idx="4294967295"/>
+          </p:nvPr>
+        </p:nvSpPr>
+        <p:spPr>
+          <a:xfrm>
+            <a:off x="10591495" y="6355080"/>
+            <a:ext cx="914400" cy="274320"/>
+          </a:xfrm>
+          <a:prstGeom prst="rect">
+            <a:avLst/>
+          </a:prstGeom>
+          <a:extLst>
+            <a:ext uri="{C572A759-6A51-4108-AA02-DFA0A04FC94B}">
+              <ma14:wrappingTextBoxFlag xmlns:ma14="http://schemas.microsoft.com/office/mac/drawingml/2011/main" val="0"/>
+            </a:ext>
+          </a:extLst>
+        </p:spPr>
+        <p:txBody>
+          <a:bodyPr/>
+          <a:lstStyle>
+            <a:lvl1pPr>
+              <a:defRPr sz="1000">
+                <a:solidFill>
+                  <a:srgbClr val="AFAFAF"/>
+                </a:solidFill>
+                <a:latin typeface="Pretendard Medium"/>
+                <a:ea typeface="Pretendard Medium"/>
+                <a:cs typeface="Pretendard Medium"/>
+              </a:defRPr>
+            </a:lvl1pPr>
+          </a:lstStyle>
+          <a:p>
+            <a:pPr algn="r"/>
+            <a:fld id="{F7021451-1387-4CA6-816F-3879F97B5CBC}" type="slidenum">
+              <a:rPr b="0" lang="en-US"/>
+              <a:t>1004</a:t>
+            </a:fld>
+            <a:endParaRPr lang="en-US"/>
+          </a:p>
+        </p:txBody>
+      </p:sp>
+    </p:spTree>
+  </p:cSld>
+  <p:clrMapOvr>
+    <a:masterClrMapping/>
+  </p:clrMapOvr>
+</p:sld>
+</file>
+
+<file path=ppt/slides/slide31.xml><?xml version="1.0" encoding="utf-8"?>
+<p:sld xmlns:a="http://schemas.openxmlformats.org/drawingml/2006/main" xmlns:p="http://schemas.openxmlformats.org/presentationml/2006/main" xmlns:r="http://schemas.openxmlformats.org/officeDocument/2006/relationships">
+  <p:cSld>
+    <p:spTree>
+      <p:nvGrpSpPr>
+        <p:cNvPr id="1" name=""/>
+        <p:cNvGrpSpPr/>
+        <p:nvPr/>
+      </p:nvGrpSpPr>
+      <p:grpSpPr/>
+      <p:sp>
+        <p:nvSpPr>
+          <p:cNvPr id="2" name="Title 1"/>
+          <p:cNvSpPr>
+            <a:spLocks noGrp="1"/>
+          </p:cNvSpPr>
+          <p:nvPr>
+            <p:ph type="title" idx="100"/>
+          </p:nvPr>
+        </p:nvSpPr>
+        <p:spPr/>
+        <p:txBody>
+          <a:bodyPr/>
+          <a:lstStyle/>
+          <a:p>
+            <a:r>
+              <a:t>6.2 병렬 실행이 필요한 시점</a:t>
+            </a:r>
+          </a:p>
+        </p:txBody>
+      </p:sp>
+      <p:sp>
+        <p:nvSpPr>
+          <p:cNvPr id="3" name="Text Placeholder 2"/>
+          <p:cNvSpPr>
+            <a:spLocks noGrp="1"/>
+          </p:cNvSpPr>
+          <p:nvPr>
+            <p:ph type="body" idx="101"/>
+          </p:nvPr>
+        </p:nvSpPr>
+        <p:spPr/>
+        <p:txBody>
+          <a:bodyPr/>
+          <a:lstStyle/>
+          <a:p>
+            <a:r>
+              <a:t>6. 병렬 실행과 정리</a:t>
+            </a:r>
+          </a:p>
+        </p:txBody>
+      </p:sp>
+      <p:sp>
+        <p:nvSpPr>
+          <p:cNvPr id="4" name="Text Placeholder 3"/>
+          <p:cNvSpPr>
+            <a:spLocks noGrp="1"/>
+          </p:cNvSpPr>
+          <p:nvPr>
+            <p:ph type="body" idx="102"/>
+          </p:nvPr>
+        </p:nvSpPr>
+        <p:spPr/>
+        <p:txBody>
+          <a:bodyPr/>
+          <a:lstStyle/>
+          <a:p>
+            <a:pPr/>
+            <a:r>
+              <a:t>지금 단계: 에이전트 하나로 충분</a:t>
+            </a:r>
+          </a:p>
+          <a:p>
+            <a:pPr/>
+            <a:r>
+              <a:t>필요해지는 시점: 팀 프로젝트에서 사람마다 다른 시나리오를 동시에</a:t>
+            </a:r>
+          </a:p>
+          <a:p>
+            <a:pPr/>
+            <a:r>
+              <a:t>판단 기준: 기다리는 시간이 확인하는 시간보다 길어질 때</a:t>
+            </a:r>
+          </a:p>
+          <a:p>
+            <a:pPr/>
+            <a:r>
+              <a:t>주의: 병렬로 늘려도 확인은 사람 몫</a:t>
+            </a:r>
+          </a:p>
+        </p:txBody>
+      </p:sp>
+      <p:sp>
+        <p:nvSpPr>
+          <p:cNvPr id="25" name="Slide Number Placeholder 0"/>
+          <p:cNvSpPr>
+            <a:spLocks noGrp="1"/>
+          </p:cNvSpPr>
+          <p:nvPr>
+            <p:ph type="sldNum" sz="quarter" idx="4294967295"/>
+          </p:nvPr>
+        </p:nvSpPr>
+        <p:spPr>
+          <a:xfrm>
+            <a:off x="10591495" y="6355080"/>
+            <a:ext cx="914400" cy="274320"/>
+          </a:xfrm>
+          <a:prstGeom prst="rect">
+            <a:avLst/>
+          </a:prstGeom>
+          <a:extLst>
+            <a:ext uri="{C572A759-6A51-4108-AA02-DFA0A04FC94B}">
+              <ma14:wrappingTextBoxFlag xmlns:ma14="http://schemas.microsoft.com/office/mac/drawingml/2011/main" val="0"/>
+            </a:ext>
+          </a:extLst>
+        </p:spPr>
+        <p:txBody>
+          <a:bodyPr/>
+          <a:lstStyle>
+            <a:lvl1pPr>
+              <a:defRPr sz="1000">
+                <a:solidFill>
+                  <a:srgbClr val="AFAFAF"/>
+                </a:solidFill>
+                <a:latin typeface="Pretendard Medium"/>
+                <a:ea typeface="Pretendard Medium"/>
+                <a:cs typeface="Pretendard Medium"/>
+              </a:defRPr>
+            </a:lvl1pPr>
+          </a:lstStyle>
+          <a:p>
+            <a:pPr algn="r"/>
+            <a:fld id="{F7021451-1387-4CA6-816F-3879F97B5CBC}" type="slidenum">
+              <a:rPr b="0" lang="en-US"/>
+              <a:t>1004</a:t>
+            </a:fld>
+            <a:endParaRPr lang="en-US"/>
+          </a:p>
+        </p:txBody>
+      </p:sp>
+    </p:spTree>
+  </p:cSld>
+  <p:clrMapOvr>
+    <a:masterClrMapping/>
+  </p:clrMapOvr>
+</p:sld>
+</file>
+
+<file path=ppt/slides/slide32.xml><?xml version="1.0" encoding="utf-8"?>
+<p:sld xmlns:a="http://schemas.openxmlformats.org/drawingml/2006/main" xmlns:p="http://schemas.openxmlformats.org/presentationml/2006/main" xmlns:r="http://schemas.openxmlformats.org/officeDocument/2006/relationships">
+  <p:cSld>
+    <p:spTree>
+      <p:nvGrpSpPr>
+        <p:cNvPr id="1" name=""/>
+        <p:cNvGrpSpPr/>
+        <p:nvPr/>
+      </p:nvGrpSpPr>
+      <p:grpSpPr/>
+      <p:sp>
+        <p:nvSpPr>
+          <p:cNvPr id="2" name="Title 1"/>
+          <p:cNvSpPr>
+            <a:spLocks noGrp="1"/>
+          </p:cNvSpPr>
+          <p:nvPr>
+            <p:ph type="title" idx="100"/>
+          </p:nvPr>
+        </p:nvSpPr>
+        <p:spPr/>
+        <p:txBody>
+          <a:bodyPr/>
+          <a:lstStyle/>
+          <a:p>
+            <a:r>
+              <a:t>6.3 설치 확인 목록</a:t>
+            </a:r>
+          </a:p>
+        </p:txBody>
+      </p:sp>
+      <p:sp>
+        <p:nvSpPr>
+          <p:cNvPr id="3" name="Text Placeholder 2"/>
+          <p:cNvSpPr>
+            <a:spLocks noGrp="1"/>
+          </p:cNvSpPr>
+          <p:nvPr>
+            <p:ph type="body" idx="101"/>
+          </p:nvPr>
+        </p:nvSpPr>
+        <p:spPr/>
+        <p:txBody>
+          <a:bodyPr/>
+          <a:lstStyle/>
+          <a:p>
+            <a:r>
+              <a:t>6. 병렬 실행과 정리</a:t>
+            </a:r>
+          </a:p>
+        </p:txBody>
+      </p:sp>
+      <p:sp>
+        <p:nvSpPr>
+          <p:cNvPr id="4" name="Text Placeholder 3"/>
+          <p:cNvSpPr>
+            <a:spLocks noGrp="1"/>
+          </p:cNvSpPr>
+          <p:nvPr>
+            <p:ph type="body" idx="102"/>
+          </p:nvPr>
+        </p:nvSpPr>
+        <p:spPr/>
+        <p:txBody>
+          <a:bodyPr/>
+          <a:lstStyle/>
+          <a:p>
+            <a:pPr/>
+            <a:r>
               <a:t>네 항목이 통과하면 오늘 목표 달성</a:t>
             </a:r>
           </a:p>
@@ -9445,7 +12184,7 @@
           <a:lstStyle/>
           <a:p>
             <a:r>
-              <a:t>표 2. 도구별 확인 방법과 정상 출력</a:t>
+              <a:t>표 4. 도구별 확인 방법과 정상 출력</a:t>
             </a:r>
           </a:p>
         </p:txBody>
@@ -10077,7 +12816,7 @@
 </p:sld>
 </file>
 
-<file path=ppt/slides/slide27.xml><?xml version="1.0" encoding="utf-8"?>
+<file path=ppt/slides/slide33.xml><?xml version="1.0" encoding="utf-8"?>
 <p:sld xmlns:a="http://schemas.openxmlformats.org/drawingml/2006/main" xmlns:p="http://schemas.openxmlformats.org/presentationml/2006/main" xmlns:r="http://schemas.openxmlformats.org/officeDocument/2006/relationships">
   <p:cSld>
     <p:spTree>
@@ -10103,7 +12842,7 @@
           <a:lstStyle/>
           <a:p>
             <a:r>
-              <a:t>6.2 오늘의 정리</a:t>
+              <a:t>6.4 오늘의 정리</a:t>
             </a:r>
           </a:p>
         </p:txBody>
@@ -10124,7 +12863,7 @@
           <a:lstStyle/>
           <a:p>
             <a:r>
-              <a:t>6. 정리</a:t>
+              <a:t>6. 병렬 실행과 정리</a:t>
             </a:r>
           </a:p>
         </p:txBody>
@@ -10152,19 +12891,19 @@
           <a:p>
             <a:pPr/>
             <a:r>
-              <a:t>에이전트의 작업 범위 = 터미널을 연 폴더</a:t>
+              <a:t>권한: 되돌릴 수 있는 폴더에서만 자동 실행을 연다</a:t>
             </a:r>
           </a:p>
           <a:p>
             <a:pPr/>
             <a:r>
-              <a:t>확인은 사람 몫 — 행 수, 결측, 필터, 넘어간 코드</a:t>
+              <a:t>관리: /clear와 /compact로 대화, md 파일로 결정과 절차</a:t>
             </a:r>
           </a:p>
           <a:p>
             <a:pPr/>
             <a:r>
-              <a:t>병렬 실행 도구는 확인이 아니라 대기를 줄이는 도구</a:t>
+              <a:t>확인은 사람 몫 — 행 수, 결측과 필터, 변경 범위</a:t>
             </a:r>
           </a:p>
         </p:txBody>
@@ -10225,7 +12964,7 @@
 </p:sld>
 </file>
 
-<file path=ppt/slides/slide28.xml><?xml version="1.0" encoding="utf-8"?>
+<file path=ppt/slides/slide34.xml><?xml version="1.0" encoding="utf-8"?>
 <p:sld xmlns:a="http://schemas.openxmlformats.org/drawingml/2006/main" xmlns:p="http://schemas.openxmlformats.org/presentationml/2006/main" xmlns:r="http://schemas.openxmlformats.org/officeDocument/2006/relationships">
   <p:cSld>
     <p:spTree>
@@ -10251,7 +12990,7 @@
           <a:lstStyle/>
           <a:p>
             <a:r>
-              <a:t>6.3 다음 시간</a:t>
+              <a:t>6.5 다음 시간</a:t>
             </a:r>
           </a:p>
         </p:txBody>
@@ -10272,7 +13011,7 @@
           <a:lstStyle/>
           <a:p>
             <a:r>
-              <a:t>6. 정리</a:t>
+              <a:t>6. 병렬 실행과 정리</a:t>
             </a:r>
           </a:p>
         </p:txBody>
@@ -10373,7 +13112,7 @@
 </p:sld>
 </file>
 
-<file path=ppt/slides/slide29.xml><?xml version="1.0" encoding="utf-8"?>
+<file path=ppt/slides/slide35.xml><?xml version="1.0" encoding="utf-8"?>
 <p:sld xmlns:a="http://schemas.openxmlformats.org/drawingml/2006/main" xmlns:p="http://schemas.openxmlformats.org/presentationml/2006/main" xmlns:r="http://schemas.openxmlformats.org/officeDocument/2006/relationships">
   <p:cSld>
     <p:spTree>
@@ -10442,118 +13181,6 @@
           <a:p>
             <a:r>
               <a:t>jihoyeo@gachon.ac.kr · AI공학관 210호</a:t>
-            </a:r>
-          </a:p>
-        </p:txBody>
-      </p:sp>
-    </p:spTree>
-  </p:cSld>
-  <p:clrMapOvr>
-    <a:masterClrMapping/>
-  </p:clrMapOvr>
-</p:sld>
-</file>
-
-<file path=ppt/slides/slide3.xml><?xml version="1.0" encoding="utf-8"?>
-<p:sld xmlns:a="http://schemas.openxmlformats.org/drawingml/2006/main" xmlns:p="http://schemas.openxmlformats.org/presentationml/2006/main" xmlns:r="http://schemas.openxmlformats.org/officeDocument/2006/relationships">
-  <p:cSld>
-    <p:spTree>
-      <p:nvGrpSpPr>
-        <p:cNvPr id="1" name=""/>
-        <p:cNvGrpSpPr/>
-        <p:nvPr/>
-      </p:nvGrpSpPr>
-      <p:grpSpPr/>
-      <p:sp>
-        <p:nvSpPr>
-          <p:cNvPr id="2" name="Text Placeholder 1"/>
-          <p:cNvSpPr>
-            <a:spLocks noGrp="1"/>
-          </p:cNvSpPr>
-          <p:nvPr>
-            <p:ph type="body" idx="100"/>
-          </p:nvPr>
-        </p:nvSpPr>
-        <p:spPr/>
-        <p:txBody>
-          <a:bodyPr/>
-          <a:lstStyle/>
-          <a:p>
-            <a:r>
-              <a:t>01</a:t>
-            </a:r>
-          </a:p>
-        </p:txBody>
-      </p:sp>
-      <p:sp>
-        <p:nvSpPr>
-          <p:cNvPr id="3" name="Title 2"/>
-          <p:cNvSpPr>
-            <a:spLocks noGrp="1"/>
-          </p:cNvSpPr>
-          <p:nvPr>
-            <p:ph type="title" idx="101"/>
-          </p:nvPr>
-        </p:nvSpPr>
-        <p:spPr/>
-        <p:txBody>
-          <a:bodyPr/>
-          <a:lstStyle/>
-          <a:p>
-            <a:r>
-              <a:t>오늘 준비하는 것</a:t>
-            </a:r>
-          </a:p>
-        </p:txBody>
-      </p:sp>
-      <p:sp>
-        <p:nvSpPr>
-          <p:cNvPr id="4" name="Text Placeholder 3"/>
-          <p:cNvSpPr>
-            <a:spLocks noGrp="1"/>
-          </p:cNvSpPr>
-          <p:nvPr>
-            <p:ph type="body" idx="102"/>
-          </p:nvPr>
-        </p:nvSpPr>
-        <p:spPr/>
-        <p:txBody>
-          <a:bodyPr/>
-          <a:lstStyle/>
-          <a:p>
-            <a:pPr>
-              <a:spcAft>
-                <a:spcPts val="1000"/>
-              </a:spcAft>
-            </a:pPr>
-            <a:r>
-              <a:rPr>
-                <a:solidFill>
-                  <a:srgbClr val="AFAFAF"/>
-                </a:solidFill>
-              </a:rPr>
-              <a:t>1.1  </a:t>
-            </a:r>
-            <a:r>
-              <a:t>오늘 만드는 작업 환경</a:t>
-            </a:r>
-          </a:p>
-          <a:p>
-            <a:pPr>
-              <a:spcAft>
-                <a:spcPts val="1000"/>
-              </a:spcAft>
-            </a:pPr>
-            <a:r>
-              <a:rPr>
-                <a:solidFill>
-                  <a:srgbClr val="AFAFAF"/>
-                </a:solidFill>
-              </a:rPr>
-              <a:t>1.2  </a:t>
-            </a:r>
-            <a:r>
-              <a:t>학습 목표</a:t>
             </a:r>
           </a:p>
         </p:txBody>
@@ -10795,13 +13422,13 @@
           <a:p>
             <a:pPr/>
             <a:r>
-              <a:t>환경 오류를 에이전트에게 맡기고 결과를 사람이 확인</a:t>
+              <a:t>권한 모드 세 단계와 각 단계를 여는 조건</a:t>
             </a:r>
           </a:p>
           <a:p>
             <a:pPr/>
             <a:r>
-              <a:t>에이전트를 여러 개 굴리는 도구의 위치 파악</a:t>
+              <a:t>명령어와 기록 파일로 맥락과 토큰 관리</a:t>
             </a:r>
           </a:p>
         </p:txBody>

--- a/slides/common/dev_env.pptx
+++ b/slides/common/dev_env.pptx
@@ -605,7 +605,7 @@
           <a:lstStyle/>
           <a:p>
             <a:r>
-              <a:t>노드를 안 깔았으면 nodejs.org에서 LTS를 먼저 설치한다. 설치가 계속 막히면 웹 버전으로 진행해도 오늘 목표에는 지장이 없다.</a:t>
+              <a:t>Codex 공식 설치 프로그램을 사용하면 Node.js를 별도로 설치할 필요가 없습니다. 설치 후 프로젝트 폴더에서 codex를 실행하고, 처음 나타나는 화면에서 로그인 방법을 선택합니다.</a:t>
             </a:r>
           </a:p>
         </p:txBody>
@@ -675,7 +675,7 @@
           <a:lstStyle/>
           <a:p>
             <a:r>
-              <a:t>에디터 안에 에이전트가 들어 있는 형태라 터미널이 낯선 사람이 시작하기 쉽다. 인텔 맥은 지원 대상이 아니므로 그 경우 VS Code에 터미널 에이전트 조합으로 간다.</a:t>
+              <a:t>Antigravity는 편집기 안에서 에이전트를 사용하는 형태입니다. 터미널 사용이 익숙하지 않은 학생은 이 도구로 시작할 수 있습니다. macOS용 설치 파일은 Apple Silicon과 Intel을 구분해 제공하므로 자신의 기기에 맞는 파일을 선택합니다.</a:t>
             </a:r>
           </a:p>
         </p:txBody>
@@ -745,7 +745,7 @@
           <a:lstStyle/>
           <a:p>
             <a:r>
-              <a:t>세 개를 다 깔게 하는 이유는 한도가 서로 다른 시점에 소진되기 때문이다. 과제는 셋 중 무엇을 썼는지 묻지 않는다. 학생 계정 지원 여부는 단톡방에 공지한다.</a:t>
+              <a:t>여러 도구를 설치해 두면 한 도구의 사용 한도를 모두 썼거나 서비스에 접속할 수 없을 때 다른 도구로 작업을 이어갈 수 있습니다. 과제에서는 사용한 도구의 종류를 평가하지 않습니다. 학생 계정 지원 여부는 단톡방에서 별도로 안내합니다.</a:t>
             </a:r>
           </a:p>
         </p:txBody>
@@ -815,7 +815,7 @@
           <a:lstStyle/>
           <a:p>
             <a:r>
-              <a:t>폴더를 잘못 열고 지시하면 엉뚱한 파일이 바뀐다. 첫 줄에서 경로를 확인하는 습관을 오늘 들인다.</a:t>
+              <a:t>에이전트를 잘못된 폴더에서 실행하면 의도하지 않은 파일을 수정할 수 있습니다. 작업을 시작할 때 현재 경로와 파일 목록을 먼저 확인합니다.</a:t>
             </a:r>
           </a:p>
         </p:txBody>
@@ -885,7 +885,7 @@
           <a:lstStyle/>
           <a:p>
             <a:r>
-              <a:t>Shift+Tab을 누르면 기본, acceptEdits, plan, bypassPermissions 순으로 돈다. 화면 아래 표시로 지금 어느 모드인지 항상 보인다. 수업에서는 plan 모드로 계획을 먼저 받고 실행으로 넘어가는 순서를 권한다.</a:t>
+              <a:t>Claude Code에서 Shift+Tab을 누르면 기본, acceptEdits, plan, bypassPermissions 순서로 전환되고 현재 모드가 화면 아래에 표시됩니다. 수업에서는 plan 모드로 계획을 확인한 뒤 실행 단계로 넘어가는 순서를 권장합니다.</a:t>
             </a:r>
           </a:p>
         </p:txBody>
@@ -955,7 +955,7 @@
           <a:lstStyle/>
           <a:p>
             <a:r>
-              <a:t>전면 자동은 확인을 없애는 기능이 아니라 확인 시점을 뒤로 미루는 기능이다. 되돌릴 수 없는 상태에서 열면 사고가 난다. 커밋하고 열고, 끝나면 git diff로 본다.</a:t>
+              <a:t>전면 자동은 확인을 생략하는 기능이 아니라 확인 시점을 뒤로 옮기는 기능입니다. 커밋하지 않은 상태에서 사용하면 잘못된 수정을 복구하기 어렵습니다. 커밋한 뒤에 실행하고, 작업이 끝나면 git diff로 변경 내용을 확인합니다.</a:t>
             </a:r>
           </a:p>
         </p:txBody>
@@ -1025,7 +1025,7 @@
           <a:lstStyle/>
           <a:p>
             <a:r>
-              <a:t>여기서 각자 한 번 시켜 본다. 설치가 이미 끝난 사람은 파이썬 버전과 설치된 패키지를 정리해 달라고 시킨다. 지시가 길 필요는 없고, 목적과 실패 시 행동을 적는 것으로 충분하다.</a:t>
+              <a:t>각자 에이전트에게 한 번 지시해 봅니다. 설치를 이미 마친 학생은 파이썬 버전과 설치된 패키지를 점검하도록 요청합니다. 지시에는 작업 목적과 실패했을 때 보고할 내용을 포함하면 충분합니다.</a:t>
             </a:r>
           </a:p>
         </p:txBody>
@@ -1095,7 +1095,7 @@
           <a:lstStyle/>
           <a:p>
             <a:r>
-              <a:t>도구 사용 여부는 묻지 않는다. 설명할 수 있는지만 확인한다. 확인 없이 넘어간 코드가 오차의 출처다.</a:t>
+              <a:t>평가에서는 어떤 도구를 사용했는지보다 결과를 설명하고 검증할 수 있는지를 확인합니다. 작성한 코드와 분석 결과를 설명하지 못하면 제출물의 타당성을 평가할 수 없습니다.</a:t>
             </a:r>
           </a:p>
         </p:txBody>
@@ -1165,7 +1165,7 @@
           <a:lstStyle/>
           <a:p>
             <a:r>
-              <a:t>명령 목록은 /help로 언제든 볼 수 있다. 오늘은 네 개만 외우게 한다. 모델 변경, 비우기, 압축, 규칙 파일이다.</a:t>
+              <a:t>코드 작성 뒤에는 원본 행 수, 결측 처리, 필터 범위를 차례로 확인합니다. 두 과목의 과제에서도 이 검증 과정을 평가합니다.</a:t>
             </a:r>
           </a:p>
         </p:txBody>
@@ -1235,7 +1235,7 @@
           <a:lstStyle/>
           <a:p>
             <a:r>
-              <a:t>한 세션에서 세 시간 붙잡고 있으면 앞부분 대화가 계속 따라다닌다. 학생들이 한도를 가장 빨리 소진하는 경로가 이것이다.</a:t>
+              <a:t>전체 명령 목록은 /help로 확인할 수 있습니다. 이번 시간에는 표의 네 가지를 먼저 익히고, 나머지는 필요할 때 찾아 쓰도록 안내합니다.</a:t>
             </a:r>
           </a:p>
         </p:txBody>
@@ -1305,7 +1305,7 @@
           <a:lstStyle/>
           <a:p>
             <a:r>
-              <a:t>두 과목이 같은 환경을 쓴다. 설치가 막히는 사람은 손을 들게 하고, 끝난 사람이 옆자리를 돕게 한다. 오늘 안 끝나면 오피스 아워에서 이어 처리한다.</a:t>
+              <a:t>두 과목에서 같은 개발 환경을 사용합니다. 설치 중 오류가 발생하면 먼저 설치를 마친 학생과 함께 해결하고, 수업 안에 끝내지 못한 항목은 오피스 아워에서 지원합니다.</a:t>
             </a:r>
           </a:p>
         </p:txBody>
@@ -1375,7 +1375,7 @@
           <a:lstStyle/>
           <a:p>
             <a:r>
-              <a:t>항상 가장 큰 모델을 쓰는 것은 한도를 빨리 쓰는 방법일 뿐이다. 반대로 검증하기 어려운 작업에 작은 모델을 쓰면 확인 비용이 더 든다.</a:t>
+              <a:t>한 세션을 오래 유지하면 앞부분 대화가 계속 함께 전송되어 응답이 느려지고 사용 한도가 빨리 소진됩니다. 학생들이 한도를 가장 빨리 소진하는 경로가 이 부분입니다.</a:t>
             </a:r>
           </a:p>
         </p:txBody>
@@ -1445,7 +1445,7 @@
           <a:lstStyle/>
           <a:p>
             <a:r>
-              <a:t>팀 프로젝트에서 특히 크다. 데이터 정의와 결정 근거를 md에 적어 두면 팀원과 에이전트가 같은 문서를 본다. 저장소 안에 있으니 깃 이력으로 언제 무엇이 바뀌었는지도 남는다.</a:t>
+              <a:t>항상 가장 큰 모델을 사용하면 사용 한도가 빨리 소진됩니다. 반대로 검증이 어려운 작업에 작은 모델을 사용하면 확인에 더 많은 시간이 듭니다.</a:t>
             </a:r>
           </a:p>
         </p:txBody>
@@ -1515,7 +1515,7 @@
           <a:lstStyle/>
           <a:p>
             <a:r>
-              <a:t>네 가지를 지키면 같은 한도로 몇 배를 쓴다. 절약 자체가 목적이 아니라, 한 세션이 짧고 목적이 분명할수록 결과가 정확해진다.</a:t>
+              <a:t>팀 프로젝트에서 특히 유용합니다. 데이터 정의와 결정 근거를 md 파일에 적어 두면 팀원과 에이전트가 같은 문서를 참조합니다. 저장소에 두면 Git 이력으로 변경 시점도 확인할 수 있습니다.</a:t>
             </a:r>
           </a:p>
         </p:txBody>
@@ -1585,7 +1585,7 @@
           <a:lstStyle/>
           <a:p>
             <a:r>
-              <a:t>브랜치마다 작업 폴더를 따로 두는 것이 worktree다. 에이전트마다 폴더가 다르니 같은 파일을 동시에 고쳐도 충돌하지 않는다. 관심 있는 사람은 깃허브 stablyai/orca에서 내려받는다.</a:t>
+              <a:t>Git worktree를 사용하면 각 에이전트가 별도의 작업 폴더에서 수정할 수 있습니다. 같은 파일을 동시에 수정한 결과는 나중에 병합해야 합니다. 관심 있는 학생은 GitHub의 stablyai/orca 저장소에서 확인할 수 있습니다.</a:t>
             </a:r>
           </a:p>
         </p:txBody>
@@ -1655,7 +1655,7 @@
           <a:lstStyle/>
           <a:p>
             <a:r>
-              <a:t>도구를 늘리는 것이 진도를 늘리지 않는다. 확인이 병목이면 병렬 실행은 대기 화면만 늘린다.</a:t>
+              <a:t>에이전트 수를 늘린다고 작업 속도가 항상 빨라지지는 않습니다. 결과 검토에 시간이 오래 걸리는 상황이라면 병렬 실행보다 검증 절차를 먼저 정리해야 합니다.</a:t>
             </a:r>
           </a:p>
         </p:txBody>
@@ -1725,7 +1725,7 @@
           <a:lstStyle/>
           <a:p>
             <a:r>
-              <a:t>여기서 손을 들게 해 확인한다. 통과하지 못한 사람의 오류 메시지를 모아 오피스 아워에 처리한다.</a:t>
+              <a:t>학생별 설치 상태를 확인합니다. 해결하지 못한 오류 메시지는 모아서 오피스 아워에 지원합니다.</a:t>
             </a:r>
           </a:p>
         </p:txBody>
@@ -1795,7 +1795,7 @@
           <a:lstStyle/>
           <a:p>
             <a:r>
-              <a:t>학습 목표 네 가지를 다시 확인하고 마친다.</a:t>
+              <a:t>처음에 제시한 네 가지 학습 목표를 다시 확인합니다. 설치하지 못한 항목은 오피스 아워에서 이어서 진행하도록 안내합니다.</a:t>
             </a:r>
           </a:p>
         </p:txBody>
@@ -1865,7 +1865,7 @@
           <a:lstStyle/>
           <a:p>
             <a:r>
-              <a:t>과목별 첫 실습 내용은 각 과목 덱에서 이어 안내한다.</a:t>
+              <a:t>과목별 첫 실습 내용은 각 과목의 강의 자료에서 이어서 안내합니다.</a:t>
             </a:r>
           </a:p>
         </p:txBody>
@@ -1935,7 +1935,7 @@
           <a:lstStyle/>
           <a:p>
             <a:r>
-              <a:t>네 가지가 각자 노트북에서 확인되어야 다음 시간 실습이 나간다. 세 번째와 네 번째가 오늘의 무게 중심이다.</a:t>
+              <a:t>다음 실습 전에 앞의 두 항목을 개인 노트북에서 확인해야 합니다. 뒤의 두 항목은 학기 내내 사용량과 사고를 좌우하므로 오늘 기준을 정해 둡니다.</a:t>
             </a:r>
           </a:p>
         </p:txBody>
@@ -2005,7 +2005,7 @@
           <a:lstStyle/>
           <a:p>
             <a:r>
-              <a:t>Antigravity가 VS Code 기반이라 확장과 단축키가 거의 같다. 둘 다 깔아도 되고, 주력 하나를 정해 두면 수업 진행이 빠르다.</a:t>
+              <a:t>Antigravity는 VS Code를 기반으로 하므로 확장과 단축키가 대부분 같습니다. 두 편집기를 모두 설치해도 되지만, 수업에서 주로 사용할 편집기 하나를 정해 두는 편이 좋습니다.</a:t>
             </a:r>
           </a:p>
         </p:txBody>
@@ -2075,7 +2075,7 @@
           <a:lstStyle/>
           <a:p>
             <a:r>
-              <a:t>3.11로 고정하는 이유는 두 과목의 실습 코드가 그 버전에서 검증되어 있어서다. 이미 3.12나 3.13이 깔린 사람도 3.11을 추가로 설치하면 된다. 윈도우에서 파이썬이 안 잡히면 대부분 PATH 항목을 놓친 경우다.</a:t>
+              <a:t>두 과목의 실습 코드는 파이썬 3.11에서 검증했습니다. 다른 버전이 이미 설치되어 있어도 3.11을 추가로 설치할 수 있습니다. Windows에서 python 명령을 찾지 못하면 설치할 때 PATH 추가 항목을 선택했는지 먼저 확인합니다.</a:t>
             </a:r>
           </a:p>
         </p:txBody>
@@ -2145,7 +2145,7 @@
           <a:lstStyle/>
           <a:p>
             <a:r>
-              <a:t>가상환경은 과목마다 하나씩 만든다. 프롬프트 앞에 .venv 표시가 나오면 활성화된 것이다. 윈도우에서 실행 정책 오류가 나면 Set-ExecutionPolicy -Scope CurrentUser RemoteSigned를 한 번 실행한다.</a:t>
+              <a:t>과목마다 별도의 가상환경을 만듭니다. 터미널 프롬프트 앞에 .venv가 표시되면 활성화된 상태입니다. Windows에서 실행 정책 오류가 발생하면 Set-ExecutionPolicy -Scope CurrentUser RemoteSigned를 한 번 실행합니다.</a:t>
             </a:r>
           </a:p>
         </p:txBody>
@@ -2215,7 +2215,7 @@
           <a:lstStyle/>
           <a:p>
             <a:r>
-              <a:t>여기까지가 파이썬 쪽 끝이다. 인터프리터를 .venv로 안 잡으면 터미널에서는 되는데 편집기에서만 임포트가 실패한다. 학기 내내 가장 자주 나오는 증상이다.</a:t>
+              <a:t>가상환경을 설치한 뒤 VS Code의 인터프리터도 같은 .venv로 지정해야 합니다. 이 설정이 다르면 터미널에서는 패키지를 불러오지만 편집기나 노트북에서는 임포트에 실패할 수 있습니다.</a:t>
             </a:r>
           </a:p>
         </p:txBody>
@@ -2285,7 +2285,7 @@
           <a:lstStyle/>
           <a:p>
             <a:r>
-              <a:t>셋의 차이는 성능이 아니라 사람이 어디에 앉아 있는가다. 편집기는 사람이 중심이고, 터미널 에이전트는 지시와 확인이 중심이다. 오른쪽 Orca는 오늘 설치하지 않고 마지막에 소개만 한다.</a:t>
+              <a:t>편집기에서는 사용자가 코드를 직접 읽고 수정합니다. 터미널 에이전트는 사용자의 지시에 따라 파일을 수정하고 명령을 실행합니다. 두 도구 모두 같은 프로젝트 폴더를 대상으로 작업합니다. 그림 오른쪽의 Orca는 마지막에 용도만 소개합니다.</a:t>
             </a:r>
           </a:p>
         </p:txBody>
@@ -2355,7 +2355,7 @@
           <a:lstStyle/>
           <a:p>
             <a:r>
-              <a:t>윈도우는 파워셸에서 실행한다. Git for Windows를 함께 깔면 에이전트가 배시를 쓸 수 있어 명령 호환 문제가 준다. 설치 후 터미널을 새로 열어야 claude 명령이 잡힌다.</a:t>
+              <a:t>Windows에서는 PowerShell에서 설치 명령을 실행합니다. Git for Windows를 함께 설치하면 Bash 명령이 필요한 작업도 처리할 수 있습니다. 설치 후에는 터미널을 새로 열고 claude 명령을 확인합니다.</a:t>
             </a:r>
           </a:p>
         </p:txBody>
@@ -6053,7 +6053,7 @@
           <a:p>
             <a:pPr/>
             <a:r>
-              <a:t>패키지 목록: pip list — requirements의 이름이 보이는지</a:t>
+              <a:t>패키지 목록: pip list에서 requirements의 패키지 이름 확인</a:t>
             </a:r>
           </a:p>
           <a:p>
@@ -6065,7 +6065,7 @@
           <a:p>
             <a:pPr/>
             <a:r>
-              <a:t>확인 지점: 편집기 왼쪽 아래 인터프리터 표시가 .venv</a:t>
+              <a:t>최종 확인: 편집기 왼쪽 아래의 인터프리터가 .venv</a:t>
             </a:r>
           </a:p>
         </p:txBody>
@@ -6173,7 +6173,7 @@
           <a:lstStyle/>
           <a:p>
             <a:r>
-              <a:t>코딩 에이전트 세 가지</a:t>
+              <a:t>AI 코딩 도구</a:t>
             </a:r>
           </a:p>
         </p:txBody>
@@ -6207,7 +6207,7 @@
               <a:t>3.1  </a:t>
             </a:r>
             <a:r>
-              <a:t>도구의 층위</a:t>
+              <a:t>도구별 역할</a:t>
             </a:r>
           </a:p>
           <a:p>
@@ -6318,7 +6318,7 @@
           <a:lstStyle/>
           <a:p>
             <a:r>
-              <a:t>3.1 도구의 층위</a:t>
+              <a:t>3.1 도구별 역할</a:t>
             </a:r>
           </a:p>
         </p:txBody>
@@ -6339,7 +6339,7 @@
           <a:lstStyle/>
           <a:p>
             <a:r>
-              <a:t>3. 코딩 에이전트 세 가지</a:t>
+              <a:t>3. AI 코딩 도구</a:t>
             </a:r>
           </a:p>
         </p:txBody>
@@ -6373,7 +6373,7 @@
           <a:p>
             <a:pPr/>
             <a:r>
-              <a:t>공통점: 대상이 같은 프로젝트 폴더 하나</a:t>
+              <a:t>공통 작업 대상: 하나의 프로젝트 폴더</a:t>
             </a:r>
           </a:p>
         </p:txBody>
@@ -6526,7 +6526,7 @@
           <a:lstStyle/>
           <a:p>
             <a:r>
-              <a:t>3. 코딩 에이전트 세 가지</a:t>
+              <a:t>3. AI 코딩 도구</a:t>
             </a:r>
           </a:p>
         </p:txBody>
@@ -6686,7 +6686,7 @@
           <a:lstStyle/>
           <a:p>
             <a:r>
-              <a:t>3. 코딩 에이전트 세 가지</a:t>
+              <a:t>3. AI 코딩 도구</a:t>
             </a:r>
           </a:p>
         </p:txBody>
@@ -6708,25 +6708,31 @@
           <a:p>
             <a:pPr/>
             <a:r>
-              <a:t>사전 조건: Node.js 18 이상</a:t>
+              <a:t>설치 명령</a:t>
+            </a:r>
+          </a:p>
+          <a:p>
+            <a:pPr lvl="1"/>
+            <a:r>
+              <a:t>Windows PowerShell: irm https://chatgpt.com/codex/install.ps1 | iex</a:t>
+            </a:r>
+          </a:p>
+          <a:p>
+            <a:pPr lvl="1"/>
+            <a:r>
+              <a:t>macOS·Linux: curl -fsSL https://chatgpt.com/codex/install.sh | sh</a:t>
             </a:r>
           </a:p>
           <a:p>
             <a:pPr/>
             <a:r>
-              <a:t>설치 명령: npm install -g @openai/codex</a:t>
+              <a:t>확인: codex --version → 버전 번호 출력</a:t>
             </a:r>
           </a:p>
           <a:p>
             <a:pPr/>
             <a:r>
-              <a:t>첫 실행: codex 입력 → ChatGPT 계정 로그인</a:t>
-            </a:r>
-          </a:p>
-          <a:p>
-            <a:pPr/>
-            <a:r>
-              <a:t>계정 요건: ChatGPT 유료 플랜 또는 OpenAI API 키</a:t>
+              <a:t>첫 실행: 프로젝트 폴더에서 codex 입력 → ChatGPT 또는 API 키로 로그인</a:t>
             </a:r>
           </a:p>
         </p:txBody>
@@ -6834,7 +6840,7 @@
           <a:lstStyle/>
           <a:p>
             <a:r>
-              <a:t>3. 코딩 에이전트 세 가지</a:t>
+              <a:t>3. AI 코딩 도구</a:t>
             </a:r>
           </a:p>
         </p:txBody>
@@ -6862,7 +6868,7 @@
           <a:p>
             <a:pPr/>
             <a:r>
-              <a:t>요건: Windows 10 64비트 이상, macOS 12 이상(애플 실리콘), Linux</a:t>
+              <a:t>요건: Windows 10 64비트 이상 · macOS 12 이상(Apple Silicon·Intel) · Linux</a:t>
             </a:r>
           </a:p>
           <a:p>
@@ -6982,7 +6988,7 @@
           <a:lstStyle/>
           <a:p>
             <a:r>
-              <a:t>3. 코딩 에이전트 세 가지</a:t>
+              <a:t>3. AI 코딩 도구</a:t>
             </a:r>
           </a:p>
         </p:txBody>
@@ -7016,7 +7022,7 @@
           <a:p>
             <a:pPr/>
             <a:r>
-              <a:t>도구 하나가 막히면 다른 하나로 진행</a:t>
+              <a:t>한 도구를 사용할 수 없으면 다른 도구로 전환</a:t>
             </a:r>
           </a:p>
         </p:txBody>
@@ -7435,7 +7441,7 @@
                           </a:solidFill>
                           <a:latin typeface="Pretendard Medium"/>
                         </a:rPr>
-                        <a:t>유료 플랜</a:t>
+                        <a:t>구독 또는 사용량 과금</a:t>
                       </a:r>
                     </a:p>
                   </a:txBody>
@@ -7749,7 +7755,7 @@
           <a:lstStyle/>
           <a:p>
             <a:r>
-              <a:t>권한 모드와 실행</a:t>
+              <a:t>에이전트 실행과 권한</a:t>
             </a:r>
           </a:p>
         </p:txBody>
@@ -7819,7 +7825,7 @@
               <a:t>4.3  </a:t>
             </a:r>
             <a:r>
-              <a:t>권한을 여는 조건</a:t>
+              <a:t>전면 자동을 쓰는 조건</a:t>
             </a:r>
           </a:p>
           <a:p>
@@ -7855,7 +7861,7 @@
               <a:t>4.5  </a:t>
             </a:r>
             <a:r>
-              <a:t>사람이 확인하는 것</a:t>
+              <a:t>에이전트가 판단할 수 없는 것</a:t>
             </a:r>
           </a:p>
         </p:txBody>
@@ -7915,7 +7921,7 @@
           <a:lstStyle/>
           <a:p>
             <a:r>
-              <a:t>4. 권한 모드와 실행</a:t>
+              <a:t>4. 에이전트 실행과 권한</a:t>
             </a:r>
           </a:p>
         </p:txBody>
@@ -7937,7 +7943,7 @@
           <a:p>
             <a:pPr/>
             <a:r>
-              <a:t>실행 위치: 프로젝트 폴더에서 터미널 실행 → 그 폴더가 작업 범위</a:t>
+              <a:t>실행 위치: 프로젝트 폴더에서 터미널 실행 → 해당 폴더가 작업 범위</a:t>
             </a:r>
           </a:p>
           <a:p>
@@ -7955,7 +7961,7 @@
           <a:p>
             <a:pPr/>
             <a:r>
-              <a:t>위험 지점: 홈 폴더나 바탕화면에서 실행</a:t>
+              <a:t>주의 사항: 홈 폴더나 바탕화면에서 실행하지 않기</a:t>
             </a:r>
           </a:p>
         </p:txBody>
@@ -8063,7 +8069,7 @@
           <a:lstStyle/>
           <a:p>
             <a:r>
-              <a:t>4. 권한 모드와 실행</a:t>
+              <a:t>4. 에이전트 실행과 권한</a:t>
             </a:r>
           </a:p>
         </p:txBody>
@@ -8085,7 +8091,7 @@
           <a:p>
             <a:pPr/>
             <a:r>
-              <a:t>전환: Claude Code는 Shift+Tab 순환, Codex는 /approvals, Antigravity는 설정 화면</a:t>
+              <a:t>전환 방법: Claude Code는 Shift+Tab · Codex는 /approvals · Antigravity는 설정 화면</a:t>
             </a:r>
           </a:p>
           <a:p>
@@ -8097,7 +8103,7 @@
           <a:p>
             <a:pPr/>
             <a:r>
-              <a:t>계획 먼저: Claude Code plan 모드 — 파일을 고치지 않고 계획만 제시</a:t>
+              <a:t>계획 우선 실행: Claude Code의 plan 모드는 파일을 수정하지 않고 계획만 제시</a:t>
             </a:r>
           </a:p>
         </p:txBody>
@@ -8907,7 +8913,7 @@
                           </a:solidFill>
                           <a:latin typeface="Pretendard"/>
                         </a:rPr>
-                        <a:t>오늘 준비하는 것</a:t>
+                        <a:t>개발 환경 준비</a:t>
                       </a:r>
                     </a:p>
                   </a:txBody>
@@ -8943,7 +8949,7 @@
                           </a:solidFill>
                           <a:latin typeface="Pretendard Medium"/>
                         </a:rPr>
-                        <a:t>1.1 오늘 만드는 작업 환경  ·  1.2 학습 목표</a:t>
+                        <a:t>1.1 수업에 사용할 개발 환경  ·  1.2 학습 목표</a:t>
                       </a:r>
                     </a:p>
                   </a:txBody>
@@ -9127,7 +9133,7 @@
                           </a:solidFill>
                           <a:latin typeface="Pretendard"/>
                         </a:rPr>
-                        <a:t>코딩 에이전트 세 가지</a:t>
+                        <a:t>AI 코딩 도구</a:t>
                       </a:r>
                     </a:p>
                   </a:txBody>
@@ -9163,7 +9169,7 @@
                           </a:solidFill>
                           <a:latin typeface="Pretendard Medium"/>
                         </a:rPr>
-                        <a:t>3.1 도구의 층위  ·  3.2 Claude Code 설치  ·  3.3 Codex 설치  ·  3.4 Antigravity 설치  ·  3.5 계정과 사용 한도</a:t>
+                        <a:t>3.1 도구별 역할  ·  3.2 Claude Code 설치  ·  3.3 Codex 설치  ·  3.4 Antigravity 설치  ·  3.5 계정과 사용 한도</a:t>
                       </a:r>
                     </a:p>
                   </a:txBody>
@@ -9237,7 +9243,7 @@
                           </a:solidFill>
                           <a:latin typeface="Pretendard"/>
                         </a:rPr>
-                        <a:t>권한 모드와 실행</a:t>
+                        <a:t>에이전트 실행과 권한</a:t>
                       </a:r>
                     </a:p>
                   </a:txBody>
@@ -9273,7 +9279,7 @@
                           </a:solidFill>
                           <a:latin typeface="Pretendard Medium"/>
                         </a:rPr>
-                        <a:t>4.1 에이전트를 여는 위치  ·  4.2 권한 모드 세 단계  ·  4.3 권한을 여는 조건  ·  4.4 첫 지시 문장  ·  4.5 사람이 확인하는 것</a:t>
+                        <a:t>4.1 에이전트를 여는 위치  ·  4.2 권한 모드 세 단계  ·  4.3 전면 자동을 쓰는 조건  ·  4.4 첫 지시 문장  ·  4.5 에이전트가 판단할 수 없는 것</a:t>
                       </a:r>
                     </a:p>
                   </a:txBody>
@@ -9347,7 +9353,7 @@
                           </a:solidFill>
                           <a:latin typeface="Pretendard"/>
                         </a:rPr>
-                        <a:t>명령어와 토큰</a:t>
+                        <a:t>확인과 기록</a:t>
                       </a:r>
                     </a:p>
                   </a:txBody>
@@ -9383,7 +9389,7 @@
                           </a:solidFill>
                           <a:latin typeface="Pretendard Medium"/>
                         </a:rPr>
-                        <a:t>5.1 자주 쓰는 명령  ·  5.2 대화를 비우는 기준  ·  5.3 모델 선택  ·  5.4 md 파일로 남기는 맥락  ·  5.5 토큰을 아끼는 습관</a:t>
+                        <a:t>5.1 결과 확인 항목  ·  5.2 자주 쓰는 명령  ·  5.3 대화를 비우는 기준  ·  5.4 모델 선택  ·  5.5 md 파일로 남기는 맥락</a:t>
                       </a:r>
                     </a:p>
                   </a:txBody>
@@ -9493,7 +9499,7 @@
                           </a:solidFill>
                           <a:latin typeface="Pretendard Medium"/>
                         </a:rPr>
-                        <a:t>6.1 Orca  ·  6.2 병렬 실행이 필요한 시점  ·  6.3 설치 확인 목록  ·  6.4 오늘의 정리  ·  6.5 다음 시간</a:t>
+                        <a:t>6.1 Orca  ·  6.2 병렬 실행이 필요한 시점  ·  6.3 설치 확인 목록  ·  6.4 개발 환경 정리  ·  6.5 다음 시간</a:t>
                       </a:r>
                     </a:p>
                   </a:txBody>
@@ -9604,7 +9610,7 @@
           <a:lstStyle/>
           <a:p>
             <a:r>
-              <a:t>4.3 권한을 여는 조건</a:t>
+              <a:t>4.3 전면 자동을 쓰는 조건</a:t>
             </a:r>
           </a:p>
         </p:txBody>
@@ -9625,7 +9631,7 @@
           <a:lstStyle/>
           <a:p>
             <a:r>
-              <a:t>4. 권한 모드와 실행</a:t>
+              <a:t>4. 에이전트 실행과 권한</a:t>
             </a:r>
           </a:p>
         </p:txBody>
@@ -9647,25 +9653,25 @@
           <a:p>
             <a:pPr/>
             <a:r>
-              <a:t>조건 1: 깃 저장소이고 방금 커밋한 상태 — 되돌릴 수 있음</a:t>
+              <a:t>조건 1: Git 저장소이고 직전 작업까지 커밋된 상태</a:t>
             </a:r>
           </a:p>
           <a:p>
             <a:pPr/>
             <a:r>
-              <a:t>조건 2: 과제나 실습 폴더 — 개인 자료와 자격증명이 없는 곳</a:t>
+              <a:t>조건 2: 과제나 실습 폴더 — 개인 자료와 자격증명이 없는 위치</a:t>
             </a:r>
           </a:p>
           <a:p>
             <a:pPr/>
             <a:r>
-              <a:t>조건 3: 결과를 어떻게 확인할지 정해 둔 상태</a:t>
+              <a:t>조건 3: 결과 확인 방법을 미리 정해 둔 경우</a:t>
             </a:r>
           </a:p>
           <a:p>
             <a:pPr/>
             <a:r>
-              <a:t>금지: 홈 폴더, 연구실 공용 저장소, 자격증명이 있는 폴더</a:t>
+              <a:t>제외 대상: 홈 폴더, 연구실 공용 저장소, 자격증명이 있는 폴더</a:t>
             </a:r>
           </a:p>
         </p:txBody>
@@ -9773,7 +9779,7 @@
           <a:lstStyle/>
           <a:p>
             <a:r>
-              <a:t>4. 권한 모드와 실행</a:t>
+              <a:t>4. 에이전트 실행과 권한</a:t>
             </a:r>
           </a:p>
         </p:txBody>
@@ -9795,25 +9801,25 @@
           <a:p>
             <a:pPr/>
             <a:r>
-              <a:t>지시 예시: 이 폴더의 requirements.txt로 가상환경을 만들고 설치, 실패 시 오류 원문과 원인 보고</a:t>
+              <a:t>지시 예시: requirements.txt로 가상환경 생성과 설치 · 실패 시 오류 원문과 원인 보고</a:t>
             </a:r>
           </a:p>
           <a:p>
             <a:pPr/>
             <a:r>
-              <a:t>오류 전달 방식: 화면 캡처가 아니라 터미널 출력 원문</a:t>
+              <a:t>오류 전달 방식: 화면 캡처 대신 터미널 출력 원문</a:t>
             </a:r>
           </a:p>
           <a:p>
             <a:pPr/>
             <a:r>
-              <a:t>한 번에 한 가지 — 설치와 분석을 한 지시에 섞지 않기</a:t>
+              <a:t>작업 단위: 설치와 분석을 한 지시에 섞지 않고 하나씩 요청</a:t>
             </a:r>
           </a:p>
           <a:p>
             <a:pPr/>
             <a:r>
-              <a:t>실행 전 확인: 무엇을 바꿀 것인지 먼저 말하게 하기</a:t>
+              <a:t>실행 전 확인: 수정할 파일과 실행할 명령을 먼저 설명하도록 요청</a:t>
             </a:r>
           </a:p>
         </p:txBody>
@@ -9900,7 +9906,7 @@
           <a:lstStyle/>
           <a:p>
             <a:r>
-              <a:t>4.5 사람이 확인하는 것</a:t>
+              <a:t>4.5 에이전트가 판단할 수 없는 것</a:t>
             </a:r>
           </a:p>
         </p:txBody>
@@ -9921,7 +9927,7 @@
           <a:lstStyle/>
           <a:p>
             <a:r>
-              <a:t>4. 권한 모드와 실행</a:t>
+              <a:t>4. 에이전트 실행과 권한</a:t>
             </a:r>
           </a:p>
         </p:txBody>
@@ -9943,25 +9949,25 @@
           <a:p>
             <a:pPr/>
             <a:r>
-              <a:t>행 수: 읽어들인 결과가 원본 파일과 일치</a:t>
+              <a:t>데이터의 의미와 결과의 타당성 판단</a:t>
             </a:r>
           </a:p>
           <a:p>
             <a:pPr/>
             <a:r>
-              <a:t>결측과 필터: 처리 방식과 조건이 의도한 범위와 일치</a:t>
+              <a:t>과목 규칙 — 제출 형식, 마감, 허용 범위</a:t>
             </a:r>
           </a:p>
           <a:p>
             <a:pPr/>
             <a:r>
-              <a:t>변경 범위: git status와 git diff로 실제로 바뀐 파일 확인</a:t>
+              <a:t>실제 변경 사항의 최종 확인: git status와 파일 목록</a:t>
             </a:r>
           </a:p>
           <a:p>
             <a:pPr/>
             <a:r>
-              <a:t>책임: 제출물의 정확성은 제출한 학생</a:t>
+              <a:t>제출물의 정확성에 대한 책임: 제출한 학생</a:t>
             </a:r>
           </a:p>
         </p:txBody>
@@ -10069,7 +10075,7 @@
           <a:lstStyle/>
           <a:p>
             <a:r>
-              <a:t>명령어와 토큰</a:t>
+              <a:t>확인과 기록</a:t>
             </a:r>
           </a:p>
         </p:txBody>
@@ -10103,7 +10109,7 @@
               <a:t>5.1  </a:t>
             </a:r>
             <a:r>
-              <a:t>자주 쓰는 명령</a:t>
+              <a:t>결과 확인 항목</a:t>
             </a:r>
           </a:p>
           <a:p>
@@ -10121,7 +10127,7 @@
               <a:t>5.2  </a:t>
             </a:r>
             <a:r>
-              <a:t>대화를 비우는 기준</a:t>
+              <a:t>자주 쓰는 명령</a:t>
             </a:r>
           </a:p>
           <a:p>
@@ -10139,7 +10145,7 @@
               <a:t>5.3  </a:t>
             </a:r>
             <a:r>
-              <a:t>모델 선택</a:t>
+              <a:t>대화를 비우는 기준</a:t>
             </a:r>
           </a:p>
           <a:p>
@@ -10157,7 +10163,7 @@
               <a:t>5.4  </a:t>
             </a:r>
             <a:r>
-              <a:t>md 파일로 남기는 맥락</a:t>
+              <a:t>모델 선택</a:t>
             </a:r>
           </a:p>
           <a:p>
@@ -10175,7 +10181,7 @@
               <a:t>5.5  </a:t>
             </a:r>
             <a:r>
-              <a:t>토큰을 아끼는 습관</a:t>
+              <a:t>md 파일로 남기는 맥락</a:t>
             </a:r>
           </a:p>
         </p:txBody>
@@ -10214,7 +10220,7 @@
           <a:lstStyle/>
           <a:p>
             <a:r>
-              <a:t>5.1 자주 쓰는 명령</a:t>
+              <a:t>5.1 결과 확인 항목</a:t>
             </a:r>
           </a:p>
         </p:txBody>
@@ -10235,7 +10241,7 @@
           <a:lstStyle/>
           <a:p>
             <a:r>
-              <a:t>5. 명령어와 토큰</a:t>
+              <a:t>5. 확인과 기록</a:t>
             </a:r>
           </a:p>
         </p:txBody>
@@ -10257,19 +10263,167 @@
           <a:p>
             <a:pPr/>
             <a:r>
-              <a:t>사용량 확인: Claude Code는 /context와 /usage, Codex는 /status</a:t>
+              <a:t>행 수: 읽어들인 결과가 원본 파일과 일치</a:t>
             </a:r>
           </a:p>
           <a:p>
             <a:pPr/>
             <a:r>
-              <a:t>되돌리기: Claude Code는 /rewind, 공통으로 git diff와 git restore</a:t>
+              <a:t>결측: 삭제인지 대체인지, 대체면 어떤 값인지</a:t>
             </a:r>
           </a:p>
           <a:p>
             <a:pPr/>
             <a:r>
-              <a:t>이어서 작업: claude --continue 또는 claude --resume</a:t>
+              <a:t>필터: 조건이 의도한 범위와 일치</a:t>
+            </a:r>
+          </a:p>
+          <a:p>
+            <a:pPr/>
+            <a:r>
+              <a:t>검증하지 않은 코드: 이후 오차의 원인이 될 가능성</a:t>
+            </a:r>
+          </a:p>
+        </p:txBody>
+      </p:sp>
+      <p:sp>
+        <p:nvSpPr>
+          <p:cNvPr id="25" name="Slide Number Placeholder 0"/>
+          <p:cNvSpPr>
+            <a:spLocks noGrp="1"/>
+          </p:cNvSpPr>
+          <p:nvPr>
+            <p:ph type="sldNum" sz="quarter" idx="4294967295"/>
+          </p:nvPr>
+        </p:nvSpPr>
+        <p:spPr>
+          <a:xfrm>
+            <a:off x="10591495" y="6355080"/>
+            <a:ext cx="914400" cy="274320"/>
+          </a:xfrm>
+          <a:prstGeom prst="rect">
+            <a:avLst/>
+          </a:prstGeom>
+          <a:extLst>
+            <a:ext uri="{C572A759-6A51-4108-AA02-DFA0A04FC94B}">
+              <ma14:wrappingTextBoxFlag xmlns:ma14="http://schemas.microsoft.com/office/mac/drawingml/2011/main" val="0"/>
+            </a:ext>
+          </a:extLst>
+        </p:spPr>
+        <p:txBody>
+          <a:bodyPr/>
+          <a:lstStyle>
+            <a:lvl1pPr>
+              <a:defRPr sz="1000">
+                <a:solidFill>
+                  <a:srgbClr val="AFAFAF"/>
+                </a:solidFill>
+                <a:latin typeface="Pretendard Medium"/>
+                <a:ea typeface="Pretendard Medium"/>
+                <a:cs typeface="Pretendard Medium"/>
+              </a:defRPr>
+            </a:lvl1pPr>
+          </a:lstStyle>
+          <a:p>
+            <a:pPr algn="r"/>
+            <a:fld id="{F7021451-1387-4CA6-816F-3879F97B5CBC}" type="slidenum">
+              <a:rPr b="0" lang="en-US"/>
+              <a:t>1004</a:t>
+            </a:fld>
+            <a:endParaRPr lang="en-US"/>
+          </a:p>
+        </p:txBody>
+      </p:sp>
+    </p:spTree>
+  </p:cSld>
+  <p:clrMapOvr>
+    <a:masterClrMapping/>
+  </p:clrMapOvr>
+</p:sld>
+</file>
+
+<file path=ppt/slides/slide25.xml><?xml version="1.0" encoding="utf-8"?>
+<p:sld xmlns:a="http://schemas.openxmlformats.org/drawingml/2006/main" xmlns:p="http://schemas.openxmlformats.org/presentationml/2006/main" xmlns:r="http://schemas.openxmlformats.org/officeDocument/2006/relationships">
+  <p:cSld>
+    <p:spTree>
+      <p:nvGrpSpPr>
+        <p:cNvPr id="1" name=""/>
+        <p:cNvGrpSpPr/>
+        <p:nvPr/>
+      </p:nvGrpSpPr>
+      <p:grpSpPr/>
+      <p:sp>
+        <p:nvSpPr>
+          <p:cNvPr id="2" name="Title 1"/>
+          <p:cNvSpPr>
+            <a:spLocks noGrp="1"/>
+          </p:cNvSpPr>
+          <p:nvPr>
+            <p:ph type="title" idx="100"/>
+          </p:nvPr>
+        </p:nvSpPr>
+        <p:spPr/>
+        <p:txBody>
+          <a:bodyPr/>
+          <a:lstStyle/>
+          <a:p>
+            <a:r>
+              <a:t>5.2 자주 쓰는 명령</a:t>
+            </a:r>
+          </a:p>
+        </p:txBody>
+      </p:sp>
+      <p:sp>
+        <p:nvSpPr>
+          <p:cNvPr id="3" name="Text Placeholder 2"/>
+          <p:cNvSpPr>
+            <a:spLocks noGrp="1"/>
+          </p:cNvSpPr>
+          <p:nvPr>
+            <p:ph type="body" idx="101"/>
+          </p:nvPr>
+        </p:nvSpPr>
+        <p:spPr/>
+        <p:txBody>
+          <a:bodyPr/>
+          <a:lstStyle/>
+          <a:p>
+            <a:r>
+              <a:t>5. 확인과 기록</a:t>
+            </a:r>
+          </a:p>
+        </p:txBody>
+      </p:sp>
+      <p:sp>
+        <p:nvSpPr>
+          <p:cNvPr id="4" name="Text Placeholder 3"/>
+          <p:cNvSpPr>
+            <a:spLocks noGrp="1"/>
+          </p:cNvSpPr>
+          <p:nvPr>
+            <p:ph type="body" idx="102"/>
+          </p:nvPr>
+        </p:nvSpPr>
+        <p:spPr/>
+        <p:txBody>
+          <a:bodyPr/>
+          <a:lstStyle/>
+          <a:p>
+            <a:pPr/>
+            <a:r>
+              <a:t>사용량 확인: Claude Code는 /context와 /usage · Codex는 /status</a:t>
+            </a:r>
+          </a:p>
+          <a:p>
+            <a:pPr/>
+            <a:r>
+              <a:t>변경 취소: Claude Code는 /rewind · 공통으로 git diff와 git restore</a:t>
+            </a:r>
+          </a:p>
+          <a:p>
+            <a:pPr/>
+            <a:r>
+              <a:t>이전 작업 이어가기: claude --continue 또는 claude --resume</a:t>
             </a:r>
           </a:p>
         </p:txBody>
@@ -10922,154 +11076,6 @@
 </p:sld>
 </file>
 
-<file path=ppt/slides/slide25.xml><?xml version="1.0" encoding="utf-8"?>
-<p:sld xmlns:a="http://schemas.openxmlformats.org/drawingml/2006/main" xmlns:p="http://schemas.openxmlformats.org/presentationml/2006/main" xmlns:r="http://schemas.openxmlformats.org/officeDocument/2006/relationships">
-  <p:cSld>
-    <p:spTree>
-      <p:nvGrpSpPr>
-        <p:cNvPr id="1" name=""/>
-        <p:cNvGrpSpPr/>
-        <p:nvPr/>
-      </p:nvGrpSpPr>
-      <p:grpSpPr/>
-      <p:sp>
-        <p:nvSpPr>
-          <p:cNvPr id="2" name="Title 1"/>
-          <p:cNvSpPr>
-            <a:spLocks noGrp="1"/>
-          </p:cNvSpPr>
-          <p:nvPr>
-            <p:ph type="title" idx="100"/>
-          </p:nvPr>
-        </p:nvSpPr>
-        <p:spPr/>
-        <p:txBody>
-          <a:bodyPr/>
-          <a:lstStyle/>
-          <a:p>
-            <a:r>
-              <a:t>5.2 대화를 비우는 기준</a:t>
-            </a:r>
-          </a:p>
-        </p:txBody>
-      </p:sp>
-      <p:sp>
-        <p:nvSpPr>
-          <p:cNvPr id="3" name="Text Placeholder 2"/>
-          <p:cNvSpPr>
-            <a:spLocks noGrp="1"/>
-          </p:cNvSpPr>
-          <p:nvPr>
-            <p:ph type="body" idx="101"/>
-          </p:nvPr>
-        </p:nvSpPr>
-        <p:spPr/>
-        <p:txBody>
-          <a:bodyPr/>
-          <a:lstStyle/>
-          <a:p>
-            <a:r>
-              <a:t>5. 명령어와 토큰</a:t>
-            </a:r>
-          </a:p>
-        </p:txBody>
-      </p:sp>
-      <p:sp>
-        <p:nvSpPr>
-          <p:cNvPr id="4" name="Text Placeholder 3"/>
-          <p:cNvSpPr>
-            <a:spLocks noGrp="1"/>
-          </p:cNvSpPr>
-          <p:nvPr>
-            <p:ph type="body" idx="102"/>
-          </p:nvPr>
-        </p:nvSpPr>
-        <p:spPr/>
-        <p:txBody>
-          <a:bodyPr/>
-          <a:lstStyle/>
-          <a:p>
-            <a:pPr/>
-            <a:r>
-              <a:t>대화는 매 요청마다 통째로 다시 전송 — 길수록 느리고 비쌈</a:t>
-            </a:r>
-          </a:p>
-          <a:p>
-            <a:pPr/>
-            <a:r>
-              <a:t>작업이 바뀌면 /clear — 과제 A에서 과제 B로 넘어갈 때</a:t>
-            </a:r>
-          </a:p>
-          <a:p>
-            <a:pPr/>
-            <a:r>
-              <a:t>같은 작업이 길어지면 /compact — 요약만 남기고 이어 진행</a:t>
-            </a:r>
-          </a:p>
-          <a:p>
-            <a:pPr/>
-            <a:r>
-              <a:t>확인 방법: /context로 무엇이 얼마나 차 있는지 확인</a:t>
-            </a:r>
-          </a:p>
-        </p:txBody>
-      </p:sp>
-      <p:sp>
-        <p:nvSpPr>
-          <p:cNvPr id="25" name="Slide Number Placeholder 0"/>
-          <p:cNvSpPr>
-            <a:spLocks noGrp="1"/>
-          </p:cNvSpPr>
-          <p:nvPr>
-            <p:ph type="sldNum" sz="quarter" idx="4294967295"/>
-          </p:nvPr>
-        </p:nvSpPr>
-        <p:spPr>
-          <a:xfrm>
-            <a:off x="10591495" y="6355080"/>
-            <a:ext cx="914400" cy="274320"/>
-          </a:xfrm>
-          <a:prstGeom prst="rect">
-            <a:avLst/>
-          </a:prstGeom>
-          <a:extLst>
-            <a:ext uri="{C572A759-6A51-4108-AA02-DFA0A04FC94B}">
-              <ma14:wrappingTextBoxFlag xmlns:ma14="http://schemas.microsoft.com/office/mac/drawingml/2011/main" val="0"/>
-            </a:ext>
-          </a:extLst>
-        </p:spPr>
-        <p:txBody>
-          <a:bodyPr/>
-          <a:lstStyle>
-            <a:lvl1pPr>
-              <a:defRPr sz="1000">
-                <a:solidFill>
-                  <a:srgbClr val="AFAFAF"/>
-                </a:solidFill>
-                <a:latin typeface="Pretendard Medium"/>
-                <a:ea typeface="Pretendard Medium"/>
-                <a:cs typeface="Pretendard Medium"/>
-              </a:defRPr>
-            </a:lvl1pPr>
-          </a:lstStyle>
-          <a:p>
-            <a:pPr algn="r"/>
-            <a:fld id="{F7021451-1387-4CA6-816F-3879F97B5CBC}" type="slidenum">
-              <a:rPr b="0" lang="en-US"/>
-              <a:t>1004</a:t>
-            </a:fld>
-            <a:endParaRPr lang="en-US"/>
-          </a:p>
-        </p:txBody>
-      </p:sp>
-    </p:spTree>
-  </p:cSld>
-  <p:clrMapOvr>
-    <a:masterClrMapping/>
-  </p:clrMapOvr>
-</p:sld>
-</file>
-
 <file path=ppt/slides/slide26.xml><?xml version="1.0" encoding="utf-8"?>
 <p:sld xmlns:a="http://schemas.openxmlformats.org/drawingml/2006/main" xmlns:p="http://schemas.openxmlformats.org/presentationml/2006/main" xmlns:r="http://schemas.openxmlformats.org/officeDocument/2006/relationships">
   <p:cSld>
@@ -11096,7 +11102,7 @@
           <a:lstStyle/>
           <a:p>
             <a:r>
-              <a:t>5.3 모델 선택</a:t>
+              <a:t>5.3 대화를 비우는 기준</a:t>
             </a:r>
           </a:p>
         </p:txBody>
@@ -11117,7 +11123,7 @@
           <a:lstStyle/>
           <a:p>
             <a:r>
-              <a:t>5. 명령어와 토큰</a:t>
+              <a:t>5. 확인과 기록</a:t>
             </a:r>
           </a:p>
         </p:txBody>
@@ -11139,25 +11145,25 @@
           <a:p>
             <a:pPr/>
             <a:r>
-              <a:t>작업 난이도에 따라 /model로 변경</a:t>
+              <a:t>전송 방식: 매 요청마다 이전 대화 전체를 다시 전송</a:t>
             </a:r>
           </a:p>
           <a:p>
             <a:pPr/>
             <a:r>
-              <a:t>가벼운 작업: 파일 정리, 형식 변환, 오류 메시지 해석</a:t>
+              <a:t>작업이 바뀔 때: /clear로 이전 맥락 제거</a:t>
             </a:r>
           </a:p>
           <a:p>
             <a:pPr/>
             <a:r>
-              <a:t>무거운 작업: 설계 결정, 알고리즘 구현, 원인이 불분명한 오류</a:t>
+              <a:t>같은 작업이 길어질 때: /compact로 요약만 남기고 계속</a:t>
             </a:r>
           </a:p>
           <a:p>
             <a:pPr/>
             <a:r>
-              <a:t>판단 기준: 답이 틀렸을 때 알아챌 수 있는지 여부</a:t>
+              <a:t>상태 점검: /context로 무엇이 얼마나 차 있는지 확인</a:t>
             </a:r>
           </a:p>
         </p:txBody>
@@ -11244,7 +11250,7 @@
           <a:lstStyle/>
           <a:p>
             <a:r>
-              <a:t>5.4 md 파일로 남기는 맥락</a:t>
+              <a:t>5.4 모델 선택</a:t>
             </a:r>
           </a:p>
         </p:txBody>
@@ -11265,7 +11271,7 @@
           <a:lstStyle/>
           <a:p>
             <a:r>
-              <a:t>5. 명령어와 토큰</a:t>
+              <a:t>5. 확인과 기록</a:t>
             </a:r>
           </a:p>
         </p:txBody>
@@ -11287,25 +11293,25 @@
           <a:p>
             <a:pPr/>
             <a:r>
-              <a:t>대화는 사라지고 파일은 남음 — 결정과 절차는 md로 기록</a:t>
+              <a:t>변경 방법: /model로 작업 난이도에 맞게 선택</a:t>
             </a:r>
           </a:p>
           <a:p>
             <a:pPr/>
             <a:r>
-              <a:t>프로젝트 규칙: CLAUDE.md 또는 AGENTS.md, /init으로 생성</a:t>
+              <a:t>가벼운 작업: 파일 정리, 형식 변환, 오류 메시지 해석</a:t>
             </a:r>
           </a:p>
           <a:p>
             <a:pPr/>
             <a:r>
-              <a:t>작업 기록: notes 폴더에 주제별 md 한 장씩</a:t>
+              <a:t>무거운 작업: 설계 결정, 알고리즘 구현, 원인이 불분명한 오류</a:t>
             </a:r>
           </a:p>
           <a:p>
             <a:pPr/>
             <a:r>
-              <a:t>다음 세션: 대화를 이어 가는 대신 그 파일만 읽히기</a:t>
+              <a:t>판단 기준: 결과가 틀렸을 때 스스로 확인할 수 있는지 여부</a:t>
             </a:r>
           </a:p>
         </p:txBody>
@@ -11392,7 +11398,7 @@
           <a:lstStyle/>
           <a:p>
             <a:r>
-              <a:t>5.5 토큰을 아끼는 습관</a:t>
+              <a:t>5.5 md 파일로 남기는 맥락</a:t>
             </a:r>
           </a:p>
         </p:txBody>
@@ -11413,7 +11419,7 @@
           <a:lstStyle/>
           <a:p>
             <a:r>
-              <a:t>5. 명령어와 토큰</a:t>
+              <a:t>5. 확인과 기록</a:t>
             </a:r>
           </a:p>
         </p:txBody>
@@ -11435,25 +11441,25 @@
           <a:p>
             <a:pPr/>
             <a:r>
-              <a:t>범위 좁히기: 폴더 전체 대신 파일과 함수 지정</a:t>
+              <a:t>기록 이유: 대화는 초기화되지만 파일은 저장소에 남음</a:t>
             </a:r>
           </a:p>
           <a:p>
             <a:pPr/>
             <a:r>
-              <a:t>계획 먼저: plan 모드로 합의한 뒤 실행 — 잘못 고친 뒤의 복구 비용이 가장 큼</a:t>
+              <a:t>프로젝트 규칙: CLAUDE.md 또는 AGENTS.md · /init으로 생성</a:t>
             </a:r>
           </a:p>
           <a:p>
             <a:pPr/>
             <a:r>
-              <a:t>반복 지시는 규칙 파일로 이동 — 매번 다시 설명하지 않기</a:t>
+              <a:t>작업 기록: notes 폴더에 주제별 md 파일</a:t>
             </a:r>
           </a:p>
           <a:p>
             <a:pPr/>
             <a:r>
-              <a:t>작업 끝나면 결과를 md로 요약하고 /clear</a:t>
+              <a:t>다음 세션: 대화를 이어가는 대신 해당 파일을 먼저 읽히기</a:t>
             </a:r>
           </a:p>
         </p:txBody>
@@ -11649,7 +11655,7 @@
               <a:t>6.4  </a:t>
             </a:r>
             <a:r>
-              <a:t>오늘의 정리</a:t>
+              <a:t>개발 환경 정리</a:t>
             </a:r>
           </a:p>
           <a:p>
@@ -11727,7 +11733,7 @@
           <a:lstStyle/>
           <a:p>
             <a:r>
-              <a:t>오늘 준비하는 것</a:t>
+              <a:t>개발 환경 준비</a:t>
             </a:r>
           </a:p>
         </p:txBody>
@@ -11761,7 +11767,7 @@
               <a:t>1.1  </a:t>
             </a:r>
             <a:r>
-              <a:t>오늘 만드는 작업 환경</a:t>
+              <a:t>수업에 사용할 개발 환경</a:t>
             </a:r>
           </a:p>
           <a:p>
@@ -11867,7 +11873,7 @@
           <a:p>
             <a:pPr/>
             <a:r>
-              <a:t>격리 방식: 깃 worktree 하나에 에이전트 하나</a:t>
+              <a:t>격리 방식: 에이전트마다 별도의 Git worktree 사용</a:t>
             </a:r>
           </a:p>
           <a:p>
@@ -11879,7 +11885,7 @@
           <a:p>
             <a:pPr/>
             <a:r>
-              <a:t>오늘 설치 대상 아님 — 존재와 쓰임만 확인</a:t>
+              <a:t>이번 시간에는 설치하지 않고 용도만 확인</a:t>
             </a:r>
           </a:p>
         </p:txBody>
@@ -12015,7 +12021,7 @@
           <a:p>
             <a:pPr/>
             <a:r>
-              <a:t>필요해지는 시점: 팀 프로젝트에서 사람마다 다른 시나리오를 동시에</a:t>
+              <a:t>활용 시점: 팀 프로젝트에서 서로 다른 시나리오를 동시에 분석할 때</a:t>
             </a:r>
           </a:p>
           <a:p>
@@ -12027,7 +12033,7 @@
           <a:p>
             <a:pPr/>
             <a:r>
-              <a:t>주의: 병렬로 늘려도 확인은 사람 몫</a:t>
+              <a:t>주의 사항: 병렬 실행 결과의 최종 검증은 사용자가 수행</a:t>
             </a:r>
           </a:p>
         </p:txBody>
@@ -12157,13 +12163,13 @@
           <a:p>
             <a:pPr/>
             <a:r>
-              <a:t>네 항목이 통과하면 오늘 목표 달성</a:t>
+              <a:t>완료 기준: 네 항목 모두 정상 동작</a:t>
             </a:r>
           </a:p>
           <a:p>
             <a:pPr/>
             <a:r>
-              <a:t>하나라도 막히면 오류 원문을 단톡방에 올리기</a:t>
+              <a:t>미완료 항목: 오류 원문을 단톡방에 공유</a:t>
             </a:r>
           </a:p>
         </p:txBody>
@@ -12842,7 +12848,7 @@
           <a:lstStyle/>
           <a:p>
             <a:r>
-              <a:t>6.4 오늘의 정리</a:t>
+              <a:t>6.4 개발 환경 정리</a:t>
             </a:r>
           </a:p>
         </p:txBody>
@@ -12891,19 +12897,19 @@
           <a:p>
             <a:pPr/>
             <a:r>
-              <a:t>권한: 되돌릴 수 있는 폴더에서만 자동 실행을 연다</a:t>
+              <a:t>권한: 커밋으로 되돌릴 수 있는 폴더에서만 전면 자동 사용</a:t>
             </a:r>
           </a:p>
           <a:p>
             <a:pPr/>
             <a:r>
-              <a:t>관리: /clear와 /compact로 대화, md 파일로 결정과 절차</a:t>
+              <a:t>관리: 작업 단위로 /clear · 결정과 절차는 md 파일에 기록</a:t>
             </a:r>
           </a:p>
           <a:p>
             <a:pPr/>
             <a:r>
-              <a:t>확인은 사람 몫 — 행 수, 결측과 필터, 변경 범위</a:t>
+              <a:t>확인: 행 수, 결측 처리, 필터 범위, 검증하지 않은 코드</a:t>
             </a:r>
           </a:p>
         </p:txBody>
@@ -13033,13 +13039,13 @@
           <a:p>
             <a:pPr/>
             <a:r>
-              <a:t>두 과목 모두 다음 시간부터 각자 노트북에서 코드 실행</a:t>
+              <a:t>다음 수업부터 개인 노트북에서 코드 실행</a:t>
             </a:r>
           </a:p>
           <a:p>
             <a:pPr/>
             <a:r>
-              <a:t>준비물: 오늘 만든 가상환경, 로그인된 에이전트 1개 이상</a:t>
+              <a:t>준비물: 이번 시간에 만든 가상환경, 로그인된 에이전트 1개 이상</a:t>
             </a:r>
           </a:p>
           <a:p>
@@ -13138,7 +13144,7 @@
           <a:lstStyle/>
           <a:p>
             <a:r>
-              <a:t>확인 항목 네 개를 각자 노트북에서 통과시키고 마칩니다</a:t>
+              <a:t>설치와 로그인 상태를 확인합니다</a:t>
             </a:r>
           </a:p>
         </p:txBody>
@@ -13159,7 +13165,7 @@
           <a:lstStyle/>
           <a:p>
             <a:r>
-              <a:t>막힌 사람은 오피스 아워 수요일 17시</a:t>
+              <a:t>설치 지원 · 수요일 17:00 오피스 아워</a:t>
             </a:r>
           </a:p>
         </p:txBody>
@@ -13219,7 +13225,7 @@
           <a:lstStyle/>
           <a:p>
             <a:r>
-              <a:t>1.1 오늘 만드는 작업 환경</a:t>
+              <a:t>1.1 수업에 사용할 개발 환경</a:t>
             </a:r>
           </a:p>
         </p:txBody>
@@ -13240,7 +13246,7 @@
           <a:lstStyle/>
           <a:p>
             <a:r>
-              <a:t>1. 오늘 준비하는 것</a:t>
+              <a:t>1. 개발 환경 준비</a:t>
             </a:r>
           </a:p>
         </p:txBody>
@@ -13262,25 +13268,25 @@
           <a:p>
             <a:pPr/>
             <a:r>
-              <a:t>설치 대상 4가지 — 편집기, 파이썬, 터미널 에이전트 2종</a:t>
+              <a:t>설치 대상: 편집기, 파이썬, AI 코딩 도구</a:t>
             </a:r>
           </a:p>
           <a:p>
             <a:pPr/>
             <a:r>
-              <a:t>두 과목 공용 — 같은 환경으로 한 학기 진행</a:t>
+              <a:t>적용 범위: 두 과목에서 한 학기 동안 공통으로 사용</a:t>
             </a:r>
           </a:p>
           <a:p>
             <a:pPr/>
             <a:r>
-              <a:t>진행 방식: 슬라이드를 화면에 표시한 상태로 각자 노트북에서 설치</a:t>
+              <a:t>진행 방식: 안내 슬라이드를 보며 개인 노트북에 직접 설치</a:t>
             </a:r>
           </a:p>
           <a:p>
             <a:pPr/>
             <a:r>
-              <a:t>오늘의 종료 조건: 확인 항목 네 개가 각자 화면에서 통과</a:t>
+              <a:t>완료 기준: 설치 확인 항목 네 개 통과</a:t>
             </a:r>
           </a:p>
         </p:txBody>
@@ -13388,7 +13394,7 @@
           <a:lstStyle/>
           <a:p>
             <a:r>
-              <a:t>1. 오늘 준비하는 것</a:t>
+              <a:t>1. 개발 환경 준비</a:t>
             </a:r>
           </a:p>
         </p:txBody>
@@ -13416,19 +13422,19 @@
           <a:p>
             <a:pPr/>
             <a:r>
-              <a:t>코딩 에이전트 3종 설치와 로그인</a:t>
+              <a:t>AI 코딩 도구 3종 설치와 로그인</a:t>
             </a:r>
           </a:p>
           <a:p>
             <a:pPr/>
             <a:r>
-              <a:t>권한 모드 세 단계와 각 단계를 여는 조건</a:t>
+              <a:t>권한 모드 세 단계와 각 단계를 사용할 조건</a:t>
             </a:r>
           </a:p>
           <a:p>
             <a:pPr/>
             <a:r>
-              <a:t>명령어와 기록 파일로 맥락과 토큰 관리</a:t>
+              <a:t>명령어와 기록 파일을 이용한 맥락·사용량 관리</a:t>
             </a:r>
           </a:p>
         </p:txBody>
@@ -13706,7 +13712,7 @@
           <a:p>
             <a:pPr/>
             <a:r>
-              <a:t>내려받기: code.visualstudio.com — 운영체제 자동 인식</a:t>
+              <a:t>설치 파일: code.visualstudio.com에서 운영체제에 맞는 버전 선택</a:t>
             </a:r>
           </a:p>
           <a:p>
@@ -13730,7 +13736,7 @@
           <a:p>
             <a:pPr/>
             <a:r>
-              <a:t>편집기 선택: VS Code 또는 Antigravity 중 하나를 주력으로</a:t>
+              <a:t>주 편집기 선택: VS Code 또는 Antigravity</a:t>
             </a:r>
           </a:p>
         </p:txBody>
@@ -13860,7 +13866,7 @@
           <a:p>
             <a:pPr/>
             <a:r>
-              <a:t>내려받기: python.org — 3.11 계열</a:t>
+              <a:t>설치 파일: python.org의 3.11 계열</a:t>
             </a:r>
           </a:p>
           <a:p>
@@ -14008,7 +14014,7 @@
           <a:p>
             <a:pPr/>
             <a:r>
-              <a:t>폴더 위치: 한글과 공백이 없는 경로 (예: C 드라이브 아래 dev 폴더)</a:t>
+              <a:t>폴더 위치: 한글과 공백이 없는 경로 (예: C:\dev)</a:t>
             </a:r>
           </a:p>
           <a:p>
